--- a/templates/decks/zh/solo-company-talk/template.pptx
+++ b/templates/decks/zh/solo-company-talk/template.pptx
@@ -5433,51 +5433,7 @@
       </p:sp>
       <p:sp>
         <p:nvSpPr>
-          <p:cNvPr id="5" name="Rectangle 4"/>
-          <p:cNvSpPr/>
-          <p:nvPr/>
-        </p:nvSpPr>
-        <p:spPr>
-          <a:xfrm>
-            <a:off x="566928" y="1191006"/>
-            <a:ext cx="1097280" cy="45720"/>
-          </a:xfrm>
-          <a:prstGeom prst="rect">
-            <a:avLst/>
-          </a:prstGeom>
-          <a:solidFill>
-            <a:srgbClr val="E1542A"/>
-          </a:solidFill>
-          <a:ln>
-            <a:noFill/>
-          </a:ln>
-          <a:effectLst/>
-        </p:spPr>
-        <p:style>
-          <a:lnRef idx="1">
-            <a:schemeClr val="accent1"/>
-          </a:lnRef>
-          <a:fillRef idx="3">
-            <a:schemeClr val="accent1"/>
-          </a:fillRef>
-          <a:effectRef idx="2">
-            <a:schemeClr val="accent1"/>
-          </a:effectRef>
-          <a:fontRef idx="minor">
-            <a:schemeClr val="lt1"/>
-          </a:fontRef>
-        </p:style>
-        <p:txBody>
-          <a:bodyPr rtlCol="0" anchor="ctr"/>
-          <a:lstStyle/>
-          <a:p>
-            <a:pPr algn="ctr"/>
-          </a:p>
-        </p:txBody>
-      </p:sp>
-      <p:sp>
-        <p:nvSpPr>
-          <p:cNvPr id="6" name="TextBox 5"/>
+          <p:cNvPr id="5" name="TextBox 4"/>
           <p:cNvSpPr txBox="1"/>
           <p:nvPr/>
         </p:nvSpPr>
@@ -5524,7 +5480,7 @@
       </p:sp>
       <p:sp>
         <p:nvSpPr>
-          <p:cNvPr id="7" name="TextBox 6"/>
+          <p:cNvPr id="6" name="TextBox 5"/>
           <p:cNvSpPr txBox="1"/>
           <p:nvPr/>
         </p:nvSpPr>
@@ -5571,7 +5527,7 @@
       </p:sp>
       <p:sp>
         <p:nvSpPr>
-          <p:cNvPr id="8" name="TextBox 7"/>
+          <p:cNvPr id="7" name="TextBox 6"/>
           <p:cNvSpPr txBox="1"/>
           <p:nvPr/>
         </p:nvSpPr>
@@ -5618,7 +5574,7 @@
       </p:sp>
       <p:sp>
         <p:nvSpPr>
-          <p:cNvPr id="9" name="TextBox 8"/>
+          <p:cNvPr id="8" name="TextBox 7"/>
           <p:cNvSpPr txBox="1"/>
           <p:nvPr/>
         </p:nvSpPr>
@@ -5665,7 +5621,7 @@
       </p:sp>
       <p:sp>
         <p:nvSpPr>
-          <p:cNvPr id="10" name="TextBox 9"/>
+          <p:cNvPr id="9" name="TextBox 8"/>
           <p:cNvSpPr txBox="1"/>
           <p:nvPr/>
         </p:nvSpPr>
@@ -5712,7 +5668,7 @@
       </p:sp>
       <p:sp>
         <p:nvSpPr>
-          <p:cNvPr id="11" name="TextBox 10"/>
+          <p:cNvPr id="10" name="TextBox 9"/>
           <p:cNvSpPr txBox="1"/>
           <p:nvPr/>
         </p:nvSpPr>
@@ -5759,7 +5715,7 @@
       </p:sp>
       <p:sp>
         <p:nvSpPr>
-          <p:cNvPr id="12" name="TextBox 11"/>
+          <p:cNvPr id="11" name="TextBox 10"/>
           <p:cNvSpPr txBox="1"/>
           <p:nvPr/>
         </p:nvSpPr>
@@ -5806,7 +5762,7 @@
       </p:sp>
       <p:sp>
         <p:nvSpPr>
-          <p:cNvPr id="13" name="TextBox 12"/>
+          <p:cNvPr id="12" name="TextBox 11"/>
           <p:cNvSpPr txBox="1"/>
           <p:nvPr/>
         </p:nvSpPr>
@@ -5853,7 +5809,7 @@
       </p:sp>
       <p:sp>
         <p:nvSpPr>
-          <p:cNvPr id="14" name="Rectangle 13"/>
+          <p:cNvPr id="13" name="Rectangle 12"/>
           <p:cNvSpPr/>
           <p:nvPr/>
         </p:nvSpPr>
@@ -5897,7 +5853,7 @@
       </p:sp>
       <p:sp>
         <p:nvSpPr>
-          <p:cNvPr id="15" name="TextBox 14"/>
+          <p:cNvPr id="14" name="TextBox 13"/>
           <p:cNvSpPr txBox="1"/>
           <p:nvPr/>
         </p:nvSpPr>
@@ -6000,7 +5956,7 @@
       </p:sp>
       <p:cxnSp>
         <p:nvCxnSpPr>
-          <p:cNvPr id="16" name="Connector 15"/>
+          <p:cNvPr id="15" name="Connector 14"/>
           <p:cNvCxnSpPr/>
           <p:nvPr/>
         </p:nvCxnSpPr>
@@ -6008,6 +5964,42 @@
           <a:xfrm flipV="1">
             <a:off x="6949440" y="3977639"/>
             <a:ext cx="0" cy="365761"/>
+          </a:xfrm>
+          <a:prstGeom prst="line">
+            <a:avLst/>
+          </a:prstGeom>
+          <a:ln w="8890">
+            <a:solidFill>
+              <a:srgbClr val="168581"/>
+            </a:solidFill>
+          </a:ln>
+          <a:effectLst/>
+        </p:spPr>
+        <p:style>
+          <a:lnRef idx="2">
+            <a:schemeClr val="accent1"/>
+          </a:lnRef>
+          <a:fillRef idx="0">
+            <a:schemeClr val="accent1"/>
+          </a:fillRef>
+          <a:effectRef idx="1">
+            <a:schemeClr val="accent1"/>
+          </a:effectRef>
+          <a:fontRef idx="minor">
+            <a:schemeClr val="tx1"/>
+          </a:fontRef>
+        </p:style>
+      </p:cxnSp>
+      <p:cxnSp>
+        <p:nvCxnSpPr>
+          <p:cNvPr id="16" name="Connector 15"/>
+          <p:cNvCxnSpPr/>
+          <p:nvPr/>
+        </p:nvCxnSpPr>
+        <p:spPr>
+          <a:xfrm flipV="1">
+            <a:off x="6949440" y="4115352"/>
+            <a:ext cx="285962" cy="228048"/>
           </a:xfrm>
           <a:prstGeom prst="line">
             <a:avLst/>
@@ -6041,9 +6033,9 @@
           <p:nvPr/>
         </p:nvCxnSpPr>
         <p:spPr>
-          <a:xfrm flipV="1">
-            <a:off x="6949440" y="4115352"/>
-            <a:ext cx="285962" cy="228048"/>
+          <a:xfrm>
+            <a:off x="6949440" y="4343400"/>
+            <a:ext cx="356589" cy="81389"/>
           </a:xfrm>
           <a:prstGeom prst="line">
             <a:avLst/>
@@ -6079,7 +6071,7 @@
         <p:spPr>
           <a:xfrm>
             <a:off x="6949440" y="4343400"/>
-            <a:ext cx="356589" cy="81389"/>
+            <a:ext cx="158697" cy="329538"/>
           </a:xfrm>
           <a:prstGeom prst="line">
             <a:avLst/>
@@ -6113,9 +6105,9 @@
           <p:nvPr/>
         </p:nvCxnSpPr>
         <p:spPr>
-          <a:xfrm>
-            <a:off x="6949440" y="4343400"/>
-            <a:ext cx="158697" cy="329538"/>
+          <a:xfrm flipH="1">
+            <a:off x="6790742" y="4343400"/>
+            <a:ext cx="158698" cy="329538"/>
           </a:xfrm>
           <a:prstGeom prst="line">
             <a:avLst/>
@@ -6150,8 +6142,8 @@
         </p:nvCxnSpPr>
         <p:spPr>
           <a:xfrm flipH="1">
-            <a:off x="6790742" y="4343400"/>
-            <a:ext cx="158698" cy="329538"/>
+            <a:off x="6592850" y="4343400"/>
+            <a:ext cx="356590" cy="81389"/>
           </a:xfrm>
           <a:prstGeom prst="line">
             <a:avLst/>
@@ -6185,9 +6177,9 @@
           <p:nvPr/>
         </p:nvCxnSpPr>
         <p:spPr>
-          <a:xfrm flipH="1">
-            <a:off x="6592850" y="4343400"/>
-            <a:ext cx="356590" cy="81389"/>
+          <a:xfrm flipH="1" flipV="1">
+            <a:off x="6663477" y="4115352"/>
+            <a:ext cx="285963" cy="228048"/>
           </a:xfrm>
           <a:prstGeom prst="line">
             <a:avLst/>
@@ -6214,45 +6206,9 @@
           </a:fontRef>
         </p:style>
       </p:cxnSp>
-      <p:cxnSp>
-        <p:nvCxnSpPr>
-          <p:cNvPr id="22" name="Connector 21"/>
-          <p:cNvCxnSpPr/>
-          <p:nvPr/>
-        </p:nvCxnSpPr>
-        <p:spPr>
-          <a:xfrm flipH="1" flipV="1">
-            <a:off x="6663477" y="4115352"/>
-            <a:ext cx="285963" cy="228048"/>
-          </a:xfrm>
-          <a:prstGeom prst="line">
-            <a:avLst/>
-          </a:prstGeom>
-          <a:ln w="8890">
-            <a:solidFill>
-              <a:srgbClr val="168581"/>
-            </a:solidFill>
-          </a:ln>
-          <a:effectLst/>
-        </p:spPr>
-        <p:style>
-          <a:lnRef idx="2">
-            <a:schemeClr val="accent1"/>
-          </a:lnRef>
-          <a:fillRef idx="0">
-            <a:schemeClr val="accent1"/>
-          </a:fillRef>
-          <a:effectRef idx="1">
-            <a:schemeClr val="accent1"/>
-          </a:effectRef>
-          <a:fontRef idx="minor">
-            <a:schemeClr val="tx1"/>
-          </a:fontRef>
-        </p:style>
-      </p:cxnSp>
-      <p:sp>
-        <p:nvSpPr>
-          <p:cNvPr id="23" name="Rounded Rectangle 22"/>
+      <p:sp>
+        <p:nvSpPr>
+          <p:cNvPr id="22" name="Rounded Rectangle 21"/>
           <p:cNvSpPr/>
           <p:nvPr/>
         </p:nvSpPr>
@@ -6298,7 +6254,7 @@
       </p:sp>
       <p:sp>
         <p:nvSpPr>
-          <p:cNvPr id="24" name="Rounded Rectangle 23"/>
+          <p:cNvPr id="23" name="Rounded Rectangle 22"/>
           <p:cNvSpPr/>
           <p:nvPr/>
         </p:nvSpPr>
@@ -6344,7 +6300,7 @@
       </p:sp>
       <p:sp>
         <p:nvSpPr>
-          <p:cNvPr id="25" name="Rounded Rectangle 24"/>
+          <p:cNvPr id="24" name="Rounded Rectangle 23"/>
           <p:cNvSpPr/>
           <p:nvPr/>
         </p:nvSpPr>
@@ -6390,7 +6346,7 @@
       </p:sp>
       <p:sp>
         <p:nvSpPr>
-          <p:cNvPr id="26" name="Rounded Rectangle 25"/>
+          <p:cNvPr id="25" name="Rounded Rectangle 24"/>
           <p:cNvSpPr/>
           <p:nvPr/>
         </p:nvSpPr>
@@ -6436,7 +6392,7 @@
       </p:sp>
       <p:sp>
         <p:nvSpPr>
-          <p:cNvPr id="27" name="Rounded Rectangle 26"/>
+          <p:cNvPr id="26" name="Rounded Rectangle 25"/>
           <p:cNvSpPr/>
           <p:nvPr/>
         </p:nvSpPr>
@@ -6482,7 +6438,7 @@
       </p:sp>
       <p:sp>
         <p:nvSpPr>
-          <p:cNvPr id="28" name="Rounded Rectangle 27"/>
+          <p:cNvPr id="27" name="Rounded Rectangle 26"/>
           <p:cNvSpPr/>
           <p:nvPr/>
         </p:nvSpPr>
@@ -6528,7 +6484,7 @@
       </p:sp>
       <p:sp>
         <p:nvSpPr>
-          <p:cNvPr id="29" name="Rounded Rectangle 28"/>
+          <p:cNvPr id="28" name="Rounded Rectangle 27"/>
           <p:cNvSpPr/>
           <p:nvPr/>
         </p:nvSpPr>
@@ -6574,7 +6530,7 @@
       </p:sp>
       <p:sp>
         <p:nvSpPr>
-          <p:cNvPr id="30" name="Rounded Rectangle 29"/>
+          <p:cNvPr id="29" name="Rounded Rectangle 28"/>
           <p:cNvSpPr/>
           <p:nvPr/>
         </p:nvSpPr>
@@ -6620,7 +6576,7 @@
       </p:sp>
       <p:cxnSp>
         <p:nvCxnSpPr>
-          <p:cNvPr id="31" name="Connector 30"/>
+          <p:cNvPr id="30" name="Connector 29"/>
           <p:cNvCxnSpPr/>
           <p:nvPr/>
         </p:nvCxnSpPr>
@@ -6628,6 +6584,42 @@
           <a:xfrm flipV="1">
             <a:off x="8284464" y="4736592"/>
             <a:ext cx="0" cy="137160"/>
+          </a:xfrm>
+          <a:prstGeom prst="line">
+            <a:avLst/>
+          </a:prstGeom>
+          <a:ln w="9525">
+            <a:solidFill>
+              <a:srgbClr val="D9D3C6"/>
+            </a:solidFill>
+          </a:ln>
+          <a:effectLst/>
+        </p:spPr>
+        <p:style>
+          <a:lnRef idx="2">
+            <a:schemeClr val="accent1"/>
+          </a:lnRef>
+          <a:fillRef idx="0">
+            <a:schemeClr val="accent1"/>
+          </a:fillRef>
+          <a:effectRef idx="1">
+            <a:schemeClr val="accent1"/>
+          </a:effectRef>
+          <a:fontRef idx="minor">
+            <a:schemeClr val="tx1"/>
+          </a:fontRef>
+        </p:style>
+      </p:cxnSp>
+      <p:cxnSp>
+        <p:nvCxnSpPr>
+          <p:cNvPr id="31" name="Connector 30"/>
+          <p:cNvCxnSpPr/>
+          <p:nvPr/>
+        </p:nvCxnSpPr>
+        <p:spPr>
+          <a:xfrm flipV="1">
+            <a:off x="8284464" y="4805172"/>
+            <a:ext cx="118784" cy="68580"/>
           </a:xfrm>
           <a:prstGeom prst="line">
             <a:avLst/>
@@ -6661,8 +6653,8 @@
           <p:nvPr/>
         </p:nvCxnSpPr>
         <p:spPr>
-          <a:xfrm flipV="1">
-            <a:off x="8284464" y="4805172"/>
+          <a:xfrm>
+            <a:off x="8284464" y="4873752"/>
             <a:ext cx="118784" cy="68580"/>
           </a:xfrm>
           <a:prstGeom prst="line">
@@ -6699,7 +6691,7 @@
         <p:spPr>
           <a:xfrm>
             <a:off x="8284464" y="4873752"/>
-            <a:ext cx="118784" cy="68580"/>
+            <a:ext cx="0" cy="137160"/>
           </a:xfrm>
           <a:prstGeom prst="line">
             <a:avLst/>
@@ -6733,9 +6725,9 @@
           <p:nvPr/>
         </p:nvCxnSpPr>
         <p:spPr>
-          <a:xfrm>
-            <a:off x="8284464" y="4873752"/>
-            <a:ext cx="0" cy="137160"/>
+          <a:xfrm flipH="1">
+            <a:off x="8165679" y="4873752"/>
+            <a:ext cx="118785" cy="68580"/>
           </a:xfrm>
           <a:prstGeom prst="line">
             <a:avLst/>
@@ -6769,8 +6761,8 @@
           <p:nvPr/>
         </p:nvCxnSpPr>
         <p:spPr>
-          <a:xfrm flipH="1">
-            <a:off x="8165679" y="4873752"/>
+          <a:xfrm flipH="1" flipV="1">
+            <a:off x="8165679" y="4805172"/>
             <a:ext cx="118785" cy="68580"/>
           </a:xfrm>
           <a:prstGeom prst="line">
@@ -6798,45 +6790,9 @@
           </a:fontRef>
         </p:style>
       </p:cxnSp>
-      <p:cxnSp>
-        <p:nvCxnSpPr>
-          <p:cNvPr id="36" name="Connector 35"/>
-          <p:cNvCxnSpPr/>
-          <p:nvPr/>
-        </p:nvCxnSpPr>
-        <p:spPr>
-          <a:xfrm flipH="1" flipV="1">
-            <a:off x="8165679" y="4805172"/>
-            <a:ext cx="118785" cy="68580"/>
-          </a:xfrm>
-          <a:prstGeom prst="line">
-            <a:avLst/>
-          </a:prstGeom>
-          <a:ln w="9525">
-            <a:solidFill>
-              <a:srgbClr val="D9D3C6"/>
-            </a:solidFill>
-          </a:ln>
-          <a:effectLst/>
-        </p:spPr>
-        <p:style>
-          <a:lnRef idx="2">
-            <a:schemeClr val="accent1"/>
-          </a:lnRef>
-          <a:fillRef idx="0">
-            <a:schemeClr val="accent1"/>
-          </a:fillRef>
-          <a:effectRef idx="1">
-            <a:schemeClr val="accent1"/>
-          </a:effectRef>
-          <a:fontRef idx="minor">
-            <a:schemeClr val="tx1"/>
-          </a:fontRef>
-        </p:style>
-      </p:cxnSp>
-      <p:sp>
-        <p:nvSpPr>
-          <p:cNvPr id="37" name="Rounded Rectangle 36"/>
+      <p:sp>
+        <p:nvSpPr>
+          <p:cNvPr id="36" name="Rounded Rectangle 35"/>
           <p:cNvSpPr/>
           <p:nvPr/>
         </p:nvSpPr>
@@ -6882,7 +6838,7 @@
       </p:sp>
       <p:sp>
         <p:nvSpPr>
-          <p:cNvPr id="38" name="Rounded Rectangle 37"/>
+          <p:cNvPr id="37" name="Rounded Rectangle 36"/>
           <p:cNvSpPr/>
           <p:nvPr/>
         </p:nvSpPr>
@@ -6928,7 +6884,7 @@
       </p:sp>
       <p:sp>
         <p:nvSpPr>
-          <p:cNvPr id="39" name="Rounded Rectangle 38"/>
+          <p:cNvPr id="38" name="Rounded Rectangle 37"/>
           <p:cNvSpPr/>
           <p:nvPr/>
         </p:nvSpPr>
@@ -6974,7 +6930,7 @@
       </p:sp>
       <p:sp>
         <p:nvSpPr>
-          <p:cNvPr id="40" name="Rounded Rectangle 39"/>
+          <p:cNvPr id="39" name="Rounded Rectangle 38"/>
           <p:cNvSpPr/>
           <p:nvPr/>
         </p:nvSpPr>
@@ -7020,7 +6976,7 @@
       </p:sp>
       <p:sp>
         <p:nvSpPr>
-          <p:cNvPr id="41" name="Rounded Rectangle 40"/>
+          <p:cNvPr id="40" name="Rounded Rectangle 39"/>
           <p:cNvSpPr/>
           <p:nvPr/>
         </p:nvSpPr>
@@ -7066,7 +7022,7 @@
       </p:sp>
       <p:sp>
         <p:nvSpPr>
-          <p:cNvPr id="42" name="Rounded Rectangle 41"/>
+          <p:cNvPr id="41" name="Rounded Rectangle 40"/>
           <p:cNvSpPr/>
           <p:nvPr/>
         </p:nvSpPr>
@@ -7112,7 +7068,7 @@
       </p:sp>
       <p:sp>
         <p:nvSpPr>
-          <p:cNvPr id="43" name="Rounded Rectangle 42"/>
+          <p:cNvPr id="42" name="Rounded Rectangle 41"/>
           <p:cNvSpPr/>
           <p:nvPr/>
         </p:nvSpPr>
@@ -7158,7 +7114,7 @@
       </p:sp>
       <p:sp>
         <p:nvSpPr>
-          <p:cNvPr id="44" name="TextBox 43"/>
+          <p:cNvPr id="43" name="TextBox 42"/>
           <p:cNvSpPr txBox="1"/>
           <p:nvPr/>
         </p:nvSpPr>
@@ -7205,7 +7161,7 @@
       </p:sp>
       <p:sp>
         <p:nvSpPr>
-          <p:cNvPr id="45" name="TextBox 44"/>
+          <p:cNvPr id="44" name="TextBox 43"/>
           <p:cNvSpPr txBox="1"/>
           <p:nvPr/>
         </p:nvSpPr>
@@ -7408,17 +7364,19 @@
       </p:sp>
       <p:sp>
         <p:nvSpPr>
-          <p:cNvPr id="5" name="Rectangle 4"/>
+          <p:cNvPr id="5" name="Rounded Rectangle 4"/>
           <p:cNvSpPr/>
           <p:nvPr/>
         </p:nvSpPr>
         <p:spPr>
           <a:xfrm>
-            <a:off x="566928" y="1191006"/>
-            <a:ext cx="1097280" cy="45720"/>
-          </a:xfrm>
-          <a:prstGeom prst="rect">
-            <a:avLst/>
+            <a:off x="365760" y="1517904"/>
+            <a:ext cx="384048" cy="384048"/>
+          </a:xfrm>
+          <a:prstGeom prst="roundRect">
+            <a:avLst>
+              <a:gd name="adj" fmla="val 50000"/>
+            </a:avLst>
           </a:prstGeom>
           <a:solidFill>
             <a:srgbClr val="E1542A"/>
@@ -7452,53 +7410,7 @@
       </p:sp>
       <p:sp>
         <p:nvSpPr>
-          <p:cNvPr id="6" name="Rounded Rectangle 5"/>
-          <p:cNvSpPr/>
-          <p:nvPr/>
-        </p:nvSpPr>
-        <p:spPr>
-          <a:xfrm>
-            <a:off x="365760" y="1517904"/>
-            <a:ext cx="384048" cy="384048"/>
-          </a:xfrm>
-          <a:prstGeom prst="roundRect">
-            <a:avLst>
-              <a:gd name="adj" fmla="val 50000"/>
-            </a:avLst>
-          </a:prstGeom>
-          <a:solidFill>
-            <a:srgbClr val="E1542A"/>
-          </a:solidFill>
-          <a:ln>
-            <a:noFill/>
-          </a:ln>
-          <a:effectLst/>
-        </p:spPr>
-        <p:style>
-          <a:lnRef idx="1">
-            <a:schemeClr val="accent1"/>
-          </a:lnRef>
-          <a:fillRef idx="3">
-            <a:schemeClr val="accent1"/>
-          </a:fillRef>
-          <a:effectRef idx="2">
-            <a:schemeClr val="accent1"/>
-          </a:effectRef>
-          <a:fontRef idx="minor">
-            <a:schemeClr val="lt1"/>
-          </a:fontRef>
-        </p:style>
-        <p:txBody>
-          <a:bodyPr rtlCol="0" anchor="ctr"/>
-          <a:lstStyle/>
-          <a:p>
-            <a:pPr algn="ctr"/>
-          </a:p>
-        </p:txBody>
-      </p:sp>
-      <p:sp>
-        <p:nvSpPr>
-          <p:cNvPr id="7" name="TextBox 6"/>
+          <p:cNvPr id="6" name="TextBox 5"/>
           <p:cNvSpPr txBox="1"/>
           <p:nvPr/>
         </p:nvSpPr>
@@ -7545,7 +7457,7 @@
       </p:sp>
       <p:sp>
         <p:nvSpPr>
-          <p:cNvPr id="8" name="TextBox 7"/>
+          <p:cNvPr id="7" name="TextBox 6"/>
           <p:cNvSpPr txBox="1"/>
           <p:nvPr/>
         </p:nvSpPr>
@@ -7592,7 +7504,7 @@
       </p:sp>
       <p:sp>
         <p:nvSpPr>
-          <p:cNvPr id="9" name="TextBox 8"/>
+          <p:cNvPr id="8" name="TextBox 7"/>
           <p:cNvSpPr txBox="1"/>
           <p:nvPr/>
         </p:nvSpPr>
@@ -7639,7 +7551,7 @@
       </p:sp>
       <p:sp>
         <p:nvSpPr>
-          <p:cNvPr id="10" name="Rounded Rectangle 9"/>
+          <p:cNvPr id="9" name="Rounded Rectangle 8"/>
           <p:cNvSpPr/>
           <p:nvPr/>
         </p:nvSpPr>
@@ -7685,7 +7597,7 @@
       </p:sp>
       <p:sp>
         <p:nvSpPr>
-          <p:cNvPr id="11" name="TextBox 10"/>
+          <p:cNvPr id="10" name="TextBox 9"/>
           <p:cNvSpPr txBox="1"/>
           <p:nvPr/>
         </p:nvSpPr>
@@ -7732,7 +7644,7 @@
       </p:sp>
       <p:sp>
         <p:nvSpPr>
-          <p:cNvPr id="12" name="TextBox 11"/>
+          <p:cNvPr id="11" name="TextBox 10"/>
           <p:cNvSpPr txBox="1"/>
           <p:nvPr/>
         </p:nvSpPr>
@@ -7779,7 +7691,7 @@
       </p:sp>
       <p:sp>
         <p:nvSpPr>
-          <p:cNvPr id="13" name="TextBox 12"/>
+          <p:cNvPr id="12" name="TextBox 11"/>
           <p:cNvSpPr txBox="1"/>
           <p:nvPr/>
         </p:nvSpPr>
@@ -7826,7 +7738,7 @@
       </p:sp>
       <p:sp>
         <p:nvSpPr>
-          <p:cNvPr id="14" name="Rounded Rectangle 13"/>
+          <p:cNvPr id="13" name="Rounded Rectangle 12"/>
           <p:cNvSpPr/>
           <p:nvPr/>
         </p:nvSpPr>
@@ -7872,7 +7784,7 @@
       </p:sp>
       <p:sp>
         <p:nvSpPr>
-          <p:cNvPr id="15" name="TextBox 14"/>
+          <p:cNvPr id="14" name="TextBox 13"/>
           <p:cNvSpPr txBox="1"/>
           <p:nvPr/>
         </p:nvSpPr>
@@ -7919,7 +7831,7 @@
       </p:sp>
       <p:sp>
         <p:nvSpPr>
-          <p:cNvPr id="16" name="TextBox 15"/>
+          <p:cNvPr id="15" name="TextBox 14"/>
           <p:cNvSpPr txBox="1"/>
           <p:nvPr/>
         </p:nvSpPr>
@@ -7966,7 +7878,7 @@
       </p:sp>
       <p:sp>
         <p:nvSpPr>
-          <p:cNvPr id="17" name="TextBox 16"/>
+          <p:cNvPr id="16" name="TextBox 15"/>
           <p:cNvSpPr txBox="1"/>
           <p:nvPr/>
         </p:nvSpPr>
@@ -8013,7 +7925,7 @@
       </p:sp>
       <p:sp>
         <p:nvSpPr>
-          <p:cNvPr id="18" name="Rounded Rectangle 17"/>
+          <p:cNvPr id="17" name="Rounded Rectangle 16"/>
           <p:cNvSpPr/>
           <p:nvPr/>
         </p:nvSpPr>
@@ -8059,7 +7971,7 @@
       </p:sp>
       <p:sp>
         <p:nvSpPr>
-          <p:cNvPr id="19" name="TextBox 18"/>
+          <p:cNvPr id="18" name="TextBox 17"/>
           <p:cNvSpPr txBox="1"/>
           <p:nvPr/>
         </p:nvSpPr>
@@ -8106,7 +8018,7 @@
       </p:sp>
       <p:sp>
         <p:nvSpPr>
-          <p:cNvPr id="20" name="TextBox 19"/>
+          <p:cNvPr id="19" name="TextBox 18"/>
           <p:cNvSpPr txBox="1"/>
           <p:nvPr/>
         </p:nvSpPr>
@@ -8153,7 +8065,7 @@
       </p:sp>
       <p:sp>
         <p:nvSpPr>
-          <p:cNvPr id="21" name="TextBox 20"/>
+          <p:cNvPr id="20" name="TextBox 19"/>
           <p:cNvSpPr txBox="1"/>
           <p:nvPr/>
         </p:nvSpPr>
@@ -8200,7 +8112,7 @@
       </p:sp>
       <p:sp>
         <p:nvSpPr>
-          <p:cNvPr id="22" name="Rounded Rectangle 21"/>
+          <p:cNvPr id="21" name="Rounded Rectangle 20"/>
           <p:cNvSpPr/>
           <p:nvPr/>
         </p:nvSpPr>
@@ -8246,7 +8158,7 @@
       </p:sp>
       <p:cxnSp>
         <p:nvCxnSpPr>
-          <p:cNvPr id="23" name="Connector 22"/>
+          <p:cNvPr id="22" name="Connector 21"/>
           <p:cNvCxnSpPr/>
           <p:nvPr/>
         </p:nvCxnSpPr>
@@ -8254,6 +8166,42 @@
           <a:xfrm flipV="1">
             <a:off x="7020559" y="1965960"/>
             <a:ext cx="0" cy="566928"/>
+          </a:xfrm>
+          <a:prstGeom prst="line">
+            <a:avLst/>
+          </a:prstGeom>
+          <a:ln w="10160">
+            <a:solidFill>
+              <a:srgbClr val="168581"/>
+            </a:solidFill>
+          </a:ln>
+          <a:effectLst/>
+        </p:spPr>
+        <p:style>
+          <a:lnRef idx="2">
+            <a:schemeClr val="accent1"/>
+          </a:lnRef>
+          <a:fillRef idx="0">
+            <a:schemeClr val="accent1"/>
+          </a:fillRef>
+          <a:effectRef idx="1">
+            <a:schemeClr val="accent1"/>
+          </a:effectRef>
+          <a:fontRef idx="minor">
+            <a:schemeClr val="tx1"/>
+          </a:fontRef>
+        </p:style>
+      </p:cxnSp>
+      <p:cxnSp>
+        <p:nvCxnSpPr>
+          <p:cNvPr id="23" name="Connector 22"/>
+          <p:cNvCxnSpPr/>
+          <p:nvPr/>
+        </p:nvCxnSpPr>
+        <p:spPr>
+          <a:xfrm flipV="1">
+            <a:off x="7020559" y="2179414"/>
+            <a:ext cx="443243" cy="353474"/>
           </a:xfrm>
           <a:prstGeom prst="line">
             <a:avLst/>
@@ -8287,9 +8235,9 @@
           <p:nvPr/>
         </p:nvCxnSpPr>
         <p:spPr>
-          <a:xfrm flipV="1">
-            <a:off x="7020559" y="2179414"/>
-            <a:ext cx="443243" cy="353474"/>
+          <a:xfrm>
+            <a:off x="7020559" y="2532888"/>
+            <a:ext cx="552714" cy="126153"/>
           </a:xfrm>
           <a:prstGeom prst="line">
             <a:avLst/>
@@ -8325,7 +8273,7 @@
         <p:spPr>
           <a:xfrm>
             <a:off x="7020559" y="2532888"/>
-            <a:ext cx="552714" cy="126153"/>
+            <a:ext cx="245981" cy="510784"/>
           </a:xfrm>
           <a:prstGeom prst="line">
             <a:avLst/>
@@ -8359,9 +8307,9 @@
           <p:nvPr/>
         </p:nvCxnSpPr>
         <p:spPr>
-          <a:xfrm>
-            <a:off x="7020559" y="2532888"/>
-            <a:ext cx="245981" cy="510784"/>
+          <a:xfrm flipH="1">
+            <a:off x="6774579" y="2532888"/>
+            <a:ext cx="245980" cy="510784"/>
           </a:xfrm>
           <a:prstGeom prst="line">
             <a:avLst/>
@@ -8396,8 +8344,8 @@
         </p:nvCxnSpPr>
         <p:spPr>
           <a:xfrm flipH="1">
-            <a:off x="6774579" y="2532888"/>
-            <a:ext cx="245980" cy="510784"/>
+            <a:off x="6467846" y="2532888"/>
+            <a:ext cx="552713" cy="126153"/>
           </a:xfrm>
           <a:prstGeom prst="line">
             <a:avLst/>
@@ -8431,9 +8379,9 @@
           <p:nvPr/>
         </p:nvCxnSpPr>
         <p:spPr>
-          <a:xfrm flipH="1">
-            <a:off x="6467846" y="2532888"/>
-            <a:ext cx="552713" cy="126153"/>
+          <a:xfrm flipH="1" flipV="1">
+            <a:off x="6577317" y="2179414"/>
+            <a:ext cx="443242" cy="353474"/>
           </a:xfrm>
           <a:prstGeom prst="line">
             <a:avLst/>
@@ -8460,45 +8408,9 @@
           </a:fontRef>
         </p:style>
       </p:cxnSp>
-      <p:cxnSp>
-        <p:nvCxnSpPr>
-          <p:cNvPr id="29" name="Connector 28"/>
-          <p:cNvCxnSpPr/>
-          <p:nvPr/>
-        </p:nvCxnSpPr>
-        <p:spPr>
-          <a:xfrm flipH="1" flipV="1">
-            <a:off x="6577317" y="2179414"/>
-            <a:ext cx="443242" cy="353474"/>
-          </a:xfrm>
-          <a:prstGeom prst="line">
-            <a:avLst/>
-          </a:prstGeom>
-          <a:ln w="10160">
-            <a:solidFill>
-              <a:srgbClr val="168581"/>
-            </a:solidFill>
-          </a:ln>
-          <a:effectLst/>
-        </p:spPr>
-        <p:style>
-          <a:lnRef idx="2">
-            <a:schemeClr val="accent1"/>
-          </a:lnRef>
-          <a:fillRef idx="0">
-            <a:schemeClr val="accent1"/>
-          </a:fillRef>
-          <a:effectRef idx="1">
-            <a:schemeClr val="accent1"/>
-          </a:effectRef>
-          <a:fontRef idx="minor">
-            <a:schemeClr val="tx1"/>
-          </a:fontRef>
-        </p:style>
-      </p:cxnSp>
-      <p:sp>
-        <p:nvSpPr>
-          <p:cNvPr id="30" name="Rounded Rectangle 29"/>
+      <p:sp>
+        <p:nvSpPr>
+          <p:cNvPr id="29" name="Rounded Rectangle 28"/>
           <p:cNvSpPr/>
           <p:nvPr/>
         </p:nvSpPr>
@@ -8544,7 +8456,7 @@
       </p:sp>
       <p:sp>
         <p:nvSpPr>
-          <p:cNvPr id="31" name="Rounded Rectangle 30"/>
+          <p:cNvPr id="30" name="Rounded Rectangle 29"/>
           <p:cNvSpPr/>
           <p:nvPr/>
         </p:nvSpPr>
@@ -8590,7 +8502,7 @@
       </p:sp>
       <p:sp>
         <p:nvSpPr>
-          <p:cNvPr id="32" name="Rounded Rectangle 31"/>
+          <p:cNvPr id="31" name="Rounded Rectangle 30"/>
           <p:cNvSpPr/>
           <p:nvPr/>
         </p:nvSpPr>
@@ -8636,7 +8548,7 @@
       </p:sp>
       <p:sp>
         <p:nvSpPr>
-          <p:cNvPr id="33" name="Rounded Rectangle 32"/>
+          <p:cNvPr id="32" name="Rounded Rectangle 31"/>
           <p:cNvSpPr/>
           <p:nvPr/>
         </p:nvSpPr>
@@ -8682,7 +8594,7 @@
       </p:sp>
       <p:sp>
         <p:nvSpPr>
-          <p:cNvPr id="34" name="Rounded Rectangle 33"/>
+          <p:cNvPr id="33" name="Rounded Rectangle 32"/>
           <p:cNvSpPr/>
           <p:nvPr/>
         </p:nvSpPr>
@@ -8728,7 +8640,7 @@
       </p:sp>
       <p:sp>
         <p:nvSpPr>
-          <p:cNvPr id="35" name="Rounded Rectangle 34"/>
+          <p:cNvPr id="34" name="Rounded Rectangle 33"/>
           <p:cNvSpPr/>
           <p:nvPr/>
         </p:nvSpPr>
@@ -8774,7 +8686,7 @@
       </p:sp>
       <p:sp>
         <p:nvSpPr>
-          <p:cNvPr id="36" name="Rounded Rectangle 35"/>
+          <p:cNvPr id="35" name="Rounded Rectangle 34"/>
           <p:cNvSpPr/>
           <p:nvPr/>
         </p:nvSpPr>
@@ -8820,7 +8732,7 @@
       </p:sp>
       <p:sp>
         <p:nvSpPr>
-          <p:cNvPr id="37" name="Rounded Rectangle 36"/>
+          <p:cNvPr id="36" name="Rounded Rectangle 35"/>
           <p:cNvSpPr/>
           <p:nvPr/>
         </p:nvSpPr>
@@ -8866,7 +8778,7 @@
       </p:sp>
       <p:sp>
         <p:nvSpPr>
-          <p:cNvPr id="38" name="TextBox 37"/>
+          <p:cNvPr id="37" name="TextBox 36"/>
           <p:cNvSpPr txBox="1"/>
           <p:nvPr/>
         </p:nvSpPr>
@@ -8959,7 +8871,7 @@
       </p:sp>
       <p:cxnSp>
         <p:nvCxnSpPr>
-          <p:cNvPr id="39" name="Connector 38"/>
+          <p:cNvPr id="38" name="Connector 37"/>
           <p:cNvCxnSpPr/>
           <p:nvPr/>
         </p:nvCxnSpPr>
@@ -8967,6 +8879,42 @@
           <a:xfrm flipV="1">
             <a:off x="8284464" y="4736592"/>
             <a:ext cx="0" cy="137160"/>
+          </a:xfrm>
+          <a:prstGeom prst="line">
+            <a:avLst/>
+          </a:prstGeom>
+          <a:ln w="9525">
+            <a:solidFill>
+              <a:srgbClr val="D9D3C6"/>
+            </a:solidFill>
+          </a:ln>
+          <a:effectLst/>
+        </p:spPr>
+        <p:style>
+          <a:lnRef idx="2">
+            <a:schemeClr val="accent1"/>
+          </a:lnRef>
+          <a:fillRef idx="0">
+            <a:schemeClr val="accent1"/>
+          </a:fillRef>
+          <a:effectRef idx="1">
+            <a:schemeClr val="accent1"/>
+          </a:effectRef>
+          <a:fontRef idx="minor">
+            <a:schemeClr val="tx1"/>
+          </a:fontRef>
+        </p:style>
+      </p:cxnSp>
+      <p:cxnSp>
+        <p:nvCxnSpPr>
+          <p:cNvPr id="39" name="Connector 38"/>
+          <p:cNvCxnSpPr/>
+          <p:nvPr/>
+        </p:nvCxnSpPr>
+        <p:spPr>
+          <a:xfrm flipV="1">
+            <a:off x="8284464" y="4805172"/>
+            <a:ext cx="118784" cy="68580"/>
           </a:xfrm>
           <a:prstGeom prst="line">
             <a:avLst/>
@@ -9000,8 +8948,8 @@
           <p:nvPr/>
         </p:nvCxnSpPr>
         <p:spPr>
-          <a:xfrm flipV="1">
-            <a:off x="8284464" y="4805172"/>
+          <a:xfrm>
+            <a:off x="8284464" y="4873752"/>
             <a:ext cx="118784" cy="68580"/>
           </a:xfrm>
           <a:prstGeom prst="line">
@@ -9038,7 +8986,7 @@
         <p:spPr>
           <a:xfrm>
             <a:off x="8284464" y="4873752"/>
-            <a:ext cx="118784" cy="68580"/>
+            <a:ext cx="0" cy="137160"/>
           </a:xfrm>
           <a:prstGeom prst="line">
             <a:avLst/>
@@ -9072,9 +9020,9 @@
           <p:nvPr/>
         </p:nvCxnSpPr>
         <p:spPr>
-          <a:xfrm>
-            <a:off x="8284464" y="4873752"/>
-            <a:ext cx="0" cy="137160"/>
+          <a:xfrm flipH="1">
+            <a:off x="8165679" y="4873752"/>
+            <a:ext cx="118785" cy="68580"/>
           </a:xfrm>
           <a:prstGeom prst="line">
             <a:avLst/>
@@ -9108,8 +9056,8 @@
           <p:nvPr/>
         </p:nvCxnSpPr>
         <p:spPr>
-          <a:xfrm flipH="1">
-            <a:off x="8165679" y="4873752"/>
+          <a:xfrm flipH="1" flipV="1">
+            <a:off x="8165679" y="4805172"/>
             <a:ext cx="118785" cy="68580"/>
           </a:xfrm>
           <a:prstGeom prst="line">
@@ -9137,45 +9085,9 @@
           </a:fontRef>
         </p:style>
       </p:cxnSp>
-      <p:cxnSp>
-        <p:nvCxnSpPr>
-          <p:cNvPr id="44" name="Connector 43"/>
-          <p:cNvCxnSpPr/>
-          <p:nvPr/>
-        </p:nvCxnSpPr>
-        <p:spPr>
-          <a:xfrm flipH="1" flipV="1">
-            <a:off x="8165679" y="4805172"/>
-            <a:ext cx="118785" cy="68580"/>
-          </a:xfrm>
-          <a:prstGeom prst="line">
-            <a:avLst/>
-          </a:prstGeom>
-          <a:ln w="9525">
-            <a:solidFill>
-              <a:srgbClr val="D9D3C6"/>
-            </a:solidFill>
-          </a:ln>
-          <a:effectLst/>
-        </p:spPr>
-        <p:style>
-          <a:lnRef idx="2">
-            <a:schemeClr val="accent1"/>
-          </a:lnRef>
-          <a:fillRef idx="0">
-            <a:schemeClr val="accent1"/>
-          </a:fillRef>
-          <a:effectRef idx="1">
-            <a:schemeClr val="accent1"/>
-          </a:effectRef>
-          <a:fontRef idx="minor">
-            <a:schemeClr val="tx1"/>
-          </a:fontRef>
-        </p:style>
-      </p:cxnSp>
-      <p:sp>
-        <p:nvSpPr>
-          <p:cNvPr id="45" name="Rounded Rectangle 44"/>
+      <p:sp>
+        <p:nvSpPr>
+          <p:cNvPr id="44" name="Rounded Rectangle 43"/>
           <p:cNvSpPr/>
           <p:nvPr/>
         </p:nvSpPr>
@@ -9221,7 +9133,7 @@
       </p:sp>
       <p:sp>
         <p:nvSpPr>
-          <p:cNvPr id="46" name="Rounded Rectangle 45"/>
+          <p:cNvPr id="45" name="Rounded Rectangle 44"/>
           <p:cNvSpPr/>
           <p:nvPr/>
         </p:nvSpPr>
@@ -9267,7 +9179,7 @@
       </p:sp>
       <p:sp>
         <p:nvSpPr>
-          <p:cNvPr id="47" name="Rounded Rectangle 46"/>
+          <p:cNvPr id="46" name="Rounded Rectangle 45"/>
           <p:cNvSpPr/>
           <p:nvPr/>
         </p:nvSpPr>
@@ -9313,7 +9225,7 @@
       </p:sp>
       <p:sp>
         <p:nvSpPr>
-          <p:cNvPr id="48" name="Rounded Rectangle 47"/>
+          <p:cNvPr id="47" name="Rounded Rectangle 46"/>
           <p:cNvSpPr/>
           <p:nvPr/>
         </p:nvSpPr>
@@ -9359,7 +9271,7 @@
       </p:sp>
       <p:sp>
         <p:nvSpPr>
-          <p:cNvPr id="49" name="Rounded Rectangle 48"/>
+          <p:cNvPr id="48" name="Rounded Rectangle 47"/>
           <p:cNvSpPr/>
           <p:nvPr/>
         </p:nvSpPr>
@@ -9405,7 +9317,7 @@
       </p:sp>
       <p:sp>
         <p:nvSpPr>
-          <p:cNvPr id="50" name="Rounded Rectangle 49"/>
+          <p:cNvPr id="49" name="Rounded Rectangle 48"/>
           <p:cNvSpPr/>
           <p:nvPr/>
         </p:nvSpPr>
@@ -9451,7 +9363,7 @@
       </p:sp>
       <p:sp>
         <p:nvSpPr>
-          <p:cNvPr id="51" name="Rounded Rectangle 50"/>
+          <p:cNvPr id="50" name="Rounded Rectangle 49"/>
           <p:cNvSpPr/>
           <p:nvPr/>
         </p:nvSpPr>
@@ -9497,7 +9409,7 @@
       </p:sp>
       <p:sp>
         <p:nvSpPr>
-          <p:cNvPr id="52" name="TextBox 51"/>
+          <p:cNvPr id="51" name="TextBox 50"/>
           <p:cNvSpPr txBox="1"/>
           <p:nvPr/>
         </p:nvSpPr>
@@ -9544,7 +9456,7 @@
       </p:sp>
       <p:sp>
         <p:nvSpPr>
-          <p:cNvPr id="53" name="TextBox 52"/>
+          <p:cNvPr id="52" name="TextBox 51"/>
           <p:cNvSpPr txBox="1"/>
           <p:nvPr/>
         </p:nvSpPr>
@@ -11494,51 +11406,7 @@
       </p:sp>
       <p:sp>
         <p:nvSpPr>
-          <p:cNvPr id="5" name="Rectangle 4"/>
-          <p:cNvSpPr/>
-          <p:nvPr/>
-        </p:nvSpPr>
-        <p:spPr>
-          <a:xfrm>
-            <a:off x="566928" y="1191006"/>
-            <a:ext cx="1097280" cy="45720"/>
-          </a:xfrm>
-          <a:prstGeom prst="rect">
-            <a:avLst/>
-          </a:prstGeom>
-          <a:solidFill>
-            <a:srgbClr val="E1542A"/>
-          </a:solidFill>
-          <a:ln>
-            <a:noFill/>
-          </a:ln>
-          <a:effectLst/>
-        </p:spPr>
-        <p:style>
-          <a:lnRef idx="1">
-            <a:schemeClr val="accent1"/>
-          </a:lnRef>
-          <a:fillRef idx="3">
-            <a:schemeClr val="accent1"/>
-          </a:fillRef>
-          <a:effectRef idx="2">
-            <a:schemeClr val="accent1"/>
-          </a:effectRef>
-          <a:fontRef idx="minor">
-            <a:schemeClr val="lt1"/>
-          </a:fontRef>
-        </p:style>
-        <p:txBody>
-          <a:bodyPr rtlCol="0" anchor="ctr"/>
-          <a:lstStyle/>
-          <a:p>
-            <a:pPr algn="ctr"/>
-          </a:p>
-        </p:txBody>
-      </p:sp>
-      <p:sp>
-        <p:nvSpPr>
-          <p:cNvPr id="6" name="Rounded Rectangle 5"/>
+          <p:cNvPr id="5" name="Rounded Rectangle 4"/>
           <p:cNvSpPr/>
           <p:nvPr/>
         </p:nvSpPr>
@@ -11586,7 +11454,7 @@
       </p:sp>
       <p:sp>
         <p:nvSpPr>
-          <p:cNvPr id="7" name="Rounded Rectangle 6"/>
+          <p:cNvPr id="6" name="Rounded Rectangle 5"/>
           <p:cNvSpPr/>
           <p:nvPr/>
         </p:nvSpPr>
@@ -11632,7 +11500,7 @@
       </p:sp>
       <p:pic>
         <p:nvPicPr>
-          <p:cNvPr id="8" name="Picture 7" descr="sparkles_168581.png"/>
+          <p:cNvPr id="7" name="Picture 6" descr="sparkles_168581.png"/>
           <p:cNvPicPr>
             <a:picLocks noChangeAspect="1"/>
           </p:cNvPicPr>
@@ -11656,7 +11524,7 @@
       </p:pic>
       <p:sp>
         <p:nvSpPr>
-          <p:cNvPr id="9" name="TextBox 8"/>
+          <p:cNvPr id="8" name="TextBox 7"/>
           <p:cNvSpPr txBox="1"/>
           <p:nvPr/>
         </p:nvSpPr>
@@ -11703,7 +11571,7 @@
       </p:sp>
       <p:sp>
         <p:nvSpPr>
-          <p:cNvPr id="10" name="TextBox 9"/>
+          <p:cNvPr id="9" name="TextBox 8"/>
           <p:cNvSpPr txBox="1"/>
           <p:nvPr/>
         </p:nvSpPr>
@@ -11750,7 +11618,7 @@
       </p:sp>
       <p:sp>
         <p:nvSpPr>
-          <p:cNvPr id="11" name="Rounded Rectangle 10"/>
+          <p:cNvPr id="10" name="Rounded Rectangle 9"/>
           <p:cNvSpPr/>
           <p:nvPr/>
         </p:nvSpPr>
@@ -11798,7 +11666,7 @@
       </p:sp>
       <p:sp>
         <p:nvSpPr>
-          <p:cNvPr id="12" name="Rounded Rectangle 11"/>
+          <p:cNvPr id="11" name="Rounded Rectangle 10"/>
           <p:cNvSpPr/>
           <p:nvPr/>
         </p:nvSpPr>
@@ -11844,7 +11712,7 @@
       </p:sp>
       <p:pic>
         <p:nvPicPr>
-          <p:cNvPr id="13" name="Picture 12" descr="bot_168581.png"/>
+          <p:cNvPr id="12" name="Picture 11" descr="bot_168581.png"/>
           <p:cNvPicPr>
             <a:picLocks noChangeAspect="1"/>
           </p:cNvPicPr>
@@ -11868,7 +11736,7 @@
       </p:pic>
       <p:sp>
         <p:nvSpPr>
-          <p:cNvPr id="14" name="TextBox 13"/>
+          <p:cNvPr id="13" name="TextBox 12"/>
           <p:cNvSpPr txBox="1"/>
           <p:nvPr/>
         </p:nvSpPr>
@@ -11915,7 +11783,7 @@
       </p:sp>
       <p:sp>
         <p:nvSpPr>
-          <p:cNvPr id="15" name="TextBox 14"/>
+          <p:cNvPr id="14" name="TextBox 13"/>
           <p:cNvSpPr txBox="1"/>
           <p:nvPr/>
         </p:nvSpPr>
@@ -11962,7 +11830,7 @@
       </p:sp>
       <p:sp>
         <p:nvSpPr>
-          <p:cNvPr id="16" name="Rounded Rectangle 15"/>
+          <p:cNvPr id="15" name="Rounded Rectangle 14"/>
           <p:cNvSpPr/>
           <p:nvPr/>
         </p:nvSpPr>
@@ -12010,7 +11878,7 @@
       </p:sp>
       <p:sp>
         <p:nvSpPr>
-          <p:cNvPr id="17" name="Rounded Rectangle 16"/>
+          <p:cNvPr id="16" name="Rounded Rectangle 15"/>
           <p:cNvSpPr/>
           <p:nvPr/>
         </p:nvSpPr>
@@ -12056,7 +11924,7 @@
       </p:sp>
       <p:pic>
         <p:nvPicPr>
-          <p:cNvPr id="18" name="Picture 17" descr="blocks_168581.png"/>
+          <p:cNvPr id="17" name="Picture 16" descr="blocks_168581.png"/>
           <p:cNvPicPr>
             <a:picLocks noChangeAspect="1"/>
           </p:cNvPicPr>
@@ -12080,7 +11948,7 @@
       </p:pic>
       <p:sp>
         <p:nvSpPr>
-          <p:cNvPr id="19" name="TextBox 18"/>
+          <p:cNvPr id="18" name="TextBox 17"/>
           <p:cNvSpPr txBox="1"/>
           <p:nvPr/>
         </p:nvSpPr>
@@ -12127,7 +11995,7 @@
       </p:sp>
       <p:sp>
         <p:nvSpPr>
-          <p:cNvPr id="20" name="TextBox 19"/>
+          <p:cNvPr id="19" name="TextBox 18"/>
           <p:cNvSpPr txBox="1"/>
           <p:nvPr/>
         </p:nvSpPr>
@@ -12174,7 +12042,7 @@
       </p:sp>
       <p:sp>
         <p:nvSpPr>
-          <p:cNvPr id="21" name="Rounded Rectangle 20"/>
+          <p:cNvPr id="20" name="Rounded Rectangle 19"/>
           <p:cNvSpPr/>
           <p:nvPr/>
         </p:nvSpPr>
@@ -12220,7 +12088,7 @@
       </p:sp>
       <p:sp>
         <p:nvSpPr>
-          <p:cNvPr id="22" name="Rectangle 21"/>
+          <p:cNvPr id="21" name="Rectangle 20"/>
           <p:cNvSpPr/>
           <p:nvPr/>
         </p:nvSpPr>
@@ -12264,7 +12132,7 @@
       </p:sp>
       <p:sp>
         <p:nvSpPr>
-          <p:cNvPr id="23" name="TextBox 22"/>
+          <p:cNvPr id="22" name="TextBox 21"/>
           <p:cNvSpPr txBox="1"/>
           <p:nvPr/>
         </p:nvSpPr>
@@ -12321,7 +12189,7 @@
       </p:sp>
       <p:cxnSp>
         <p:nvCxnSpPr>
-          <p:cNvPr id="24" name="Connector 23"/>
+          <p:cNvPr id="23" name="Connector 22"/>
           <p:cNvCxnSpPr/>
           <p:nvPr/>
         </p:nvCxnSpPr>
@@ -12329,6 +12197,42 @@
           <a:xfrm flipV="1">
             <a:off x="8284464" y="4736592"/>
             <a:ext cx="0" cy="137160"/>
+          </a:xfrm>
+          <a:prstGeom prst="line">
+            <a:avLst/>
+          </a:prstGeom>
+          <a:ln w="9525">
+            <a:solidFill>
+              <a:srgbClr val="D9D3C6"/>
+            </a:solidFill>
+          </a:ln>
+          <a:effectLst/>
+        </p:spPr>
+        <p:style>
+          <a:lnRef idx="2">
+            <a:schemeClr val="accent1"/>
+          </a:lnRef>
+          <a:fillRef idx="0">
+            <a:schemeClr val="accent1"/>
+          </a:fillRef>
+          <a:effectRef idx="1">
+            <a:schemeClr val="accent1"/>
+          </a:effectRef>
+          <a:fontRef idx="minor">
+            <a:schemeClr val="tx1"/>
+          </a:fontRef>
+        </p:style>
+      </p:cxnSp>
+      <p:cxnSp>
+        <p:nvCxnSpPr>
+          <p:cNvPr id="24" name="Connector 23"/>
+          <p:cNvCxnSpPr/>
+          <p:nvPr/>
+        </p:nvCxnSpPr>
+        <p:spPr>
+          <a:xfrm flipV="1">
+            <a:off x="8284464" y="4805172"/>
+            <a:ext cx="118784" cy="68580"/>
           </a:xfrm>
           <a:prstGeom prst="line">
             <a:avLst/>
@@ -12362,8 +12266,8 @@
           <p:nvPr/>
         </p:nvCxnSpPr>
         <p:spPr>
-          <a:xfrm flipV="1">
-            <a:off x="8284464" y="4805172"/>
+          <a:xfrm>
+            <a:off x="8284464" y="4873752"/>
             <a:ext cx="118784" cy="68580"/>
           </a:xfrm>
           <a:prstGeom prst="line">
@@ -12400,7 +12304,7 @@
         <p:spPr>
           <a:xfrm>
             <a:off x="8284464" y="4873752"/>
-            <a:ext cx="118784" cy="68580"/>
+            <a:ext cx="0" cy="137160"/>
           </a:xfrm>
           <a:prstGeom prst="line">
             <a:avLst/>
@@ -12434,9 +12338,9 @@
           <p:nvPr/>
         </p:nvCxnSpPr>
         <p:spPr>
-          <a:xfrm>
-            <a:off x="8284464" y="4873752"/>
-            <a:ext cx="0" cy="137160"/>
+          <a:xfrm flipH="1">
+            <a:off x="8165679" y="4873752"/>
+            <a:ext cx="118785" cy="68580"/>
           </a:xfrm>
           <a:prstGeom prst="line">
             <a:avLst/>
@@ -12470,8 +12374,8 @@
           <p:nvPr/>
         </p:nvCxnSpPr>
         <p:spPr>
-          <a:xfrm flipH="1">
-            <a:off x="8165679" y="4873752"/>
+          <a:xfrm flipH="1" flipV="1">
+            <a:off x="8165679" y="4805172"/>
             <a:ext cx="118785" cy="68580"/>
           </a:xfrm>
           <a:prstGeom prst="line">
@@ -12499,45 +12403,9 @@
           </a:fontRef>
         </p:style>
       </p:cxnSp>
-      <p:cxnSp>
-        <p:nvCxnSpPr>
-          <p:cNvPr id="29" name="Connector 28"/>
-          <p:cNvCxnSpPr/>
-          <p:nvPr/>
-        </p:nvCxnSpPr>
-        <p:spPr>
-          <a:xfrm flipH="1" flipV="1">
-            <a:off x="8165679" y="4805172"/>
-            <a:ext cx="118785" cy="68580"/>
-          </a:xfrm>
-          <a:prstGeom prst="line">
-            <a:avLst/>
-          </a:prstGeom>
-          <a:ln w="9525">
-            <a:solidFill>
-              <a:srgbClr val="D9D3C6"/>
-            </a:solidFill>
-          </a:ln>
-          <a:effectLst/>
-        </p:spPr>
-        <p:style>
-          <a:lnRef idx="2">
-            <a:schemeClr val="accent1"/>
-          </a:lnRef>
-          <a:fillRef idx="0">
-            <a:schemeClr val="accent1"/>
-          </a:fillRef>
-          <a:effectRef idx="1">
-            <a:schemeClr val="accent1"/>
-          </a:effectRef>
-          <a:fontRef idx="minor">
-            <a:schemeClr val="tx1"/>
-          </a:fontRef>
-        </p:style>
-      </p:cxnSp>
-      <p:sp>
-        <p:nvSpPr>
-          <p:cNvPr id="30" name="Rounded Rectangle 29"/>
+      <p:sp>
+        <p:nvSpPr>
+          <p:cNvPr id="29" name="Rounded Rectangle 28"/>
           <p:cNvSpPr/>
           <p:nvPr/>
         </p:nvSpPr>
@@ -12583,7 +12451,7 @@
       </p:sp>
       <p:sp>
         <p:nvSpPr>
-          <p:cNvPr id="31" name="Rounded Rectangle 30"/>
+          <p:cNvPr id="30" name="Rounded Rectangle 29"/>
           <p:cNvSpPr/>
           <p:nvPr/>
         </p:nvSpPr>
@@ -12629,7 +12497,7 @@
       </p:sp>
       <p:sp>
         <p:nvSpPr>
-          <p:cNvPr id="32" name="Rounded Rectangle 31"/>
+          <p:cNvPr id="31" name="Rounded Rectangle 30"/>
           <p:cNvSpPr/>
           <p:nvPr/>
         </p:nvSpPr>
@@ -12675,7 +12543,7 @@
       </p:sp>
       <p:sp>
         <p:nvSpPr>
-          <p:cNvPr id="33" name="Rounded Rectangle 32"/>
+          <p:cNvPr id="32" name="Rounded Rectangle 31"/>
           <p:cNvSpPr/>
           <p:nvPr/>
         </p:nvSpPr>
@@ -12721,7 +12589,7 @@
       </p:sp>
       <p:sp>
         <p:nvSpPr>
-          <p:cNvPr id="34" name="Rounded Rectangle 33"/>
+          <p:cNvPr id="33" name="Rounded Rectangle 32"/>
           <p:cNvSpPr/>
           <p:nvPr/>
         </p:nvSpPr>
@@ -12767,7 +12635,7 @@
       </p:sp>
       <p:sp>
         <p:nvSpPr>
-          <p:cNvPr id="35" name="Rounded Rectangle 34"/>
+          <p:cNvPr id="34" name="Rounded Rectangle 33"/>
           <p:cNvSpPr/>
           <p:nvPr/>
         </p:nvSpPr>
@@ -12813,7 +12681,7 @@
       </p:sp>
       <p:sp>
         <p:nvSpPr>
-          <p:cNvPr id="36" name="Rounded Rectangle 35"/>
+          <p:cNvPr id="35" name="Rounded Rectangle 34"/>
           <p:cNvSpPr/>
           <p:nvPr/>
         </p:nvSpPr>
@@ -12859,7 +12727,7 @@
       </p:sp>
       <p:sp>
         <p:nvSpPr>
-          <p:cNvPr id="37" name="TextBox 36"/>
+          <p:cNvPr id="36" name="TextBox 35"/>
           <p:cNvSpPr txBox="1"/>
           <p:nvPr/>
         </p:nvSpPr>
@@ -12906,7 +12774,7 @@
       </p:sp>
       <p:sp>
         <p:nvSpPr>
-          <p:cNvPr id="38" name="TextBox 37"/>
+          <p:cNvPr id="37" name="TextBox 36"/>
           <p:cNvSpPr txBox="1"/>
           <p:nvPr/>
         </p:nvSpPr>
@@ -13109,51 +12977,7 @@
       </p:sp>
       <p:sp>
         <p:nvSpPr>
-          <p:cNvPr id="5" name="Rectangle 4"/>
-          <p:cNvSpPr/>
-          <p:nvPr/>
-        </p:nvSpPr>
-        <p:spPr>
-          <a:xfrm>
-            <a:off x="566928" y="1191006"/>
-            <a:ext cx="1097280" cy="45720"/>
-          </a:xfrm>
-          <a:prstGeom prst="rect">
-            <a:avLst/>
-          </a:prstGeom>
-          <a:solidFill>
-            <a:srgbClr val="E1542A"/>
-          </a:solidFill>
-          <a:ln>
-            <a:noFill/>
-          </a:ln>
-          <a:effectLst/>
-        </p:spPr>
-        <p:style>
-          <a:lnRef idx="1">
-            <a:schemeClr val="accent1"/>
-          </a:lnRef>
-          <a:fillRef idx="3">
-            <a:schemeClr val="accent1"/>
-          </a:fillRef>
-          <a:effectRef idx="2">
-            <a:schemeClr val="accent1"/>
-          </a:effectRef>
-          <a:fontRef idx="minor">
-            <a:schemeClr val="lt1"/>
-          </a:fontRef>
-        </p:style>
-        <p:txBody>
-          <a:bodyPr rtlCol="0" anchor="ctr"/>
-          <a:lstStyle/>
-          <a:p>
-            <a:pPr algn="ctr"/>
-          </a:p>
-        </p:txBody>
-      </p:sp>
-      <p:sp>
-        <p:nvSpPr>
-          <p:cNvPr id="6" name="Rounded Rectangle 5"/>
+          <p:cNvPr id="5" name="Rounded Rectangle 4"/>
           <p:cNvSpPr/>
           <p:nvPr/>
         </p:nvSpPr>
@@ -13199,7 +13023,7 @@
       </p:sp>
       <p:sp>
         <p:nvSpPr>
-          <p:cNvPr id="7" name="TextBox 6"/>
+          <p:cNvPr id="6" name="TextBox 5"/>
           <p:cNvSpPr txBox="1"/>
           <p:nvPr/>
         </p:nvSpPr>
@@ -13246,7 +13070,7 @@
       </p:sp>
       <p:sp>
         <p:nvSpPr>
-          <p:cNvPr id="8" name="Rounded Rectangle 7"/>
+          <p:cNvPr id="7" name="Rounded Rectangle 6"/>
           <p:cNvSpPr/>
           <p:nvPr/>
         </p:nvSpPr>
@@ -13292,7 +13116,7 @@
       </p:sp>
       <p:sp>
         <p:nvSpPr>
-          <p:cNvPr id="9" name="TextBox 8"/>
+          <p:cNvPr id="8" name="TextBox 7"/>
           <p:cNvSpPr txBox="1"/>
           <p:nvPr/>
         </p:nvSpPr>
@@ -13339,7 +13163,7 @@
       </p:sp>
       <p:sp>
         <p:nvSpPr>
-          <p:cNvPr id="10" name="Rounded Rectangle 9"/>
+          <p:cNvPr id="9" name="Rounded Rectangle 8"/>
           <p:cNvSpPr/>
           <p:nvPr/>
         </p:nvSpPr>
@@ -13385,7 +13209,7 @@
       </p:sp>
       <p:sp>
         <p:nvSpPr>
-          <p:cNvPr id="11" name="TextBox 10"/>
+          <p:cNvPr id="10" name="TextBox 9"/>
           <p:cNvSpPr txBox="1"/>
           <p:nvPr/>
         </p:nvSpPr>
@@ -13432,7 +13256,7 @@
       </p:sp>
       <p:sp>
         <p:nvSpPr>
-          <p:cNvPr id="12" name="Rounded Rectangle 11"/>
+          <p:cNvPr id="11" name="Rounded Rectangle 10"/>
           <p:cNvSpPr/>
           <p:nvPr/>
         </p:nvSpPr>
@@ -13478,7 +13302,7 @@
       </p:sp>
       <p:sp>
         <p:nvSpPr>
-          <p:cNvPr id="13" name="TextBox 12"/>
+          <p:cNvPr id="12" name="TextBox 11"/>
           <p:cNvSpPr txBox="1"/>
           <p:nvPr/>
         </p:nvSpPr>
@@ -13525,7 +13349,7 @@
       </p:sp>
       <p:sp>
         <p:nvSpPr>
-          <p:cNvPr id="14" name="TextBox 13"/>
+          <p:cNvPr id="13" name="TextBox 12"/>
           <p:cNvSpPr txBox="1"/>
           <p:nvPr/>
         </p:nvSpPr>
@@ -13582,7 +13406,7 @@
       </p:sp>
       <p:sp>
         <p:nvSpPr>
-          <p:cNvPr id="15" name="TextBox 14"/>
+          <p:cNvPr id="14" name="TextBox 13"/>
           <p:cNvSpPr txBox="1"/>
           <p:nvPr/>
         </p:nvSpPr>
@@ -13629,7 +13453,7 @@
       </p:sp>
       <p:sp>
         <p:nvSpPr>
-          <p:cNvPr id="16" name="TextBox 15"/>
+          <p:cNvPr id="15" name="TextBox 14"/>
           <p:cNvSpPr txBox="1"/>
           <p:nvPr/>
         </p:nvSpPr>
@@ -13699,7 +13523,7 @@
       </p:sp>
       <p:sp>
         <p:nvSpPr>
-          <p:cNvPr id="17" name="TextBox 16"/>
+          <p:cNvPr id="16" name="TextBox 15"/>
           <p:cNvSpPr txBox="1"/>
           <p:nvPr/>
         </p:nvSpPr>
@@ -13746,7 +13570,7 @@
       </p:sp>
       <p:cxnSp>
         <p:nvCxnSpPr>
-          <p:cNvPr id="18" name="Connector 17"/>
+          <p:cNvPr id="17" name="Connector 16"/>
           <p:cNvCxnSpPr/>
           <p:nvPr/>
         </p:nvCxnSpPr>
@@ -13754,6 +13578,42 @@
           <a:xfrm flipV="1">
             <a:off x="8284464" y="4736592"/>
             <a:ext cx="0" cy="137160"/>
+          </a:xfrm>
+          <a:prstGeom prst="line">
+            <a:avLst/>
+          </a:prstGeom>
+          <a:ln w="9525">
+            <a:solidFill>
+              <a:srgbClr val="D9D3C6"/>
+            </a:solidFill>
+          </a:ln>
+          <a:effectLst/>
+        </p:spPr>
+        <p:style>
+          <a:lnRef idx="2">
+            <a:schemeClr val="accent1"/>
+          </a:lnRef>
+          <a:fillRef idx="0">
+            <a:schemeClr val="accent1"/>
+          </a:fillRef>
+          <a:effectRef idx="1">
+            <a:schemeClr val="accent1"/>
+          </a:effectRef>
+          <a:fontRef idx="minor">
+            <a:schemeClr val="tx1"/>
+          </a:fontRef>
+        </p:style>
+      </p:cxnSp>
+      <p:cxnSp>
+        <p:nvCxnSpPr>
+          <p:cNvPr id="18" name="Connector 17"/>
+          <p:cNvCxnSpPr/>
+          <p:nvPr/>
+        </p:nvCxnSpPr>
+        <p:spPr>
+          <a:xfrm flipV="1">
+            <a:off x="8284464" y="4805172"/>
+            <a:ext cx="118784" cy="68580"/>
           </a:xfrm>
           <a:prstGeom prst="line">
             <a:avLst/>
@@ -13787,8 +13647,8 @@
           <p:nvPr/>
         </p:nvCxnSpPr>
         <p:spPr>
-          <a:xfrm flipV="1">
-            <a:off x="8284464" y="4805172"/>
+          <a:xfrm>
+            <a:off x="8284464" y="4873752"/>
             <a:ext cx="118784" cy="68580"/>
           </a:xfrm>
           <a:prstGeom prst="line">
@@ -13825,7 +13685,7 @@
         <p:spPr>
           <a:xfrm>
             <a:off x="8284464" y="4873752"/>
-            <a:ext cx="118784" cy="68580"/>
+            <a:ext cx="0" cy="137160"/>
           </a:xfrm>
           <a:prstGeom prst="line">
             <a:avLst/>
@@ -13859,9 +13719,9 @@
           <p:nvPr/>
         </p:nvCxnSpPr>
         <p:spPr>
-          <a:xfrm>
-            <a:off x="8284464" y="4873752"/>
-            <a:ext cx="0" cy="137160"/>
+          <a:xfrm flipH="1">
+            <a:off x="8165679" y="4873752"/>
+            <a:ext cx="118785" cy="68580"/>
           </a:xfrm>
           <a:prstGeom prst="line">
             <a:avLst/>
@@ -13895,8 +13755,8 @@
           <p:nvPr/>
         </p:nvCxnSpPr>
         <p:spPr>
-          <a:xfrm flipH="1">
-            <a:off x="8165679" y="4873752"/>
+          <a:xfrm flipH="1" flipV="1">
+            <a:off x="8165679" y="4805172"/>
             <a:ext cx="118785" cy="68580"/>
           </a:xfrm>
           <a:prstGeom prst="line">
@@ -13924,45 +13784,9 @@
           </a:fontRef>
         </p:style>
       </p:cxnSp>
-      <p:cxnSp>
-        <p:nvCxnSpPr>
-          <p:cNvPr id="23" name="Connector 22"/>
-          <p:cNvCxnSpPr/>
-          <p:nvPr/>
-        </p:nvCxnSpPr>
-        <p:spPr>
-          <a:xfrm flipH="1" flipV="1">
-            <a:off x="8165679" y="4805172"/>
-            <a:ext cx="118785" cy="68580"/>
-          </a:xfrm>
-          <a:prstGeom prst="line">
-            <a:avLst/>
-          </a:prstGeom>
-          <a:ln w="9525">
-            <a:solidFill>
-              <a:srgbClr val="D9D3C6"/>
-            </a:solidFill>
-          </a:ln>
-          <a:effectLst/>
-        </p:spPr>
-        <p:style>
-          <a:lnRef idx="2">
-            <a:schemeClr val="accent1"/>
-          </a:lnRef>
-          <a:fillRef idx="0">
-            <a:schemeClr val="accent1"/>
-          </a:fillRef>
-          <a:effectRef idx="1">
-            <a:schemeClr val="accent1"/>
-          </a:effectRef>
-          <a:fontRef idx="minor">
-            <a:schemeClr val="tx1"/>
-          </a:fontRef>
-        </p:style>
-      </p:cxnSp>
-      <p:sp>
-        <p:nvSpPr>
-          <p:cNvPr id="24" name="Rounded Rectangle 23"/>
+      <p:sp>
+        <p:nvSpPr>
+          <p:cNvPr id="23" name="Rounded Rectangle 22"/>
           <p:cNvSpPr/>
           <p:nvPr/>
         </p:nvSpPr>
@@ -14008,7 +13832,7 @@
       </p:sp>
       <p:sp>
         <p:nvSpPr>
-          <p:cNvPr id="25" name="Rounded Rectangle 24"/>
+          <p:cNvPr id="24" name="Rounded Rectangle 23"/>
           <p:cNvSpPr/>
           <p:nvPr/>
         </p:nvSpPr>
@@ -14054,7 +13878,7 @@
       </p:sp>
       <p:sp>
         <p:nvSpPr>
-          <p:cNvPr id="26" name="Rounded Rectangle 25"/>
+          <p:cNvPr id="25" name="Rounded Rectangle 24"/>
           <p:cNvSpPr/>
           <p:nvPr/>
         </p:nvSpPr>
@@ -14100,7 +13924,7 @@
       </p:sp>
       <p:sp>
         <p:nvSpPr>
-          <p:cNvPr id="27" name="Rounded Rectangle 26"/>
+          <p:cNvPr id="26" name="Rounded Rectangle 25"/>
           <p:cNvSpPr/>
           <p:nvPr/>
         </p:nvSpPr>
@@ -14146,7 +13970,7 @@
       </p:sp>
       <p:sp>
         <p:nvSpPr>
-          <p:cNvPr id="28" name="Rounded Rectangle 27"/>
+          <p:cNvPr id="27" name="Rounded Rectangle 26"/>
           <p:cNvSpPr/>
           <p:nvPr/>
         </p:nvSpPr>
@@ -14192,7 +14016,7 @@
       </p:sp>
       <p:sp>
         <p:nvSpPr>
-          <p:cNvPr id="29" name="Rounded Rectangle 28"/>
+          <p:cNvPr id="28" name="Rounded Rectangle 27"/>
           <p:cNvSpPr/>
           <p:nvPr/>
         </p:nvSpPr>
@@ -14238,7 +14062,7 @@
       </p:sp>
       <p:sp>
         <p:nvSpPr>
-          <p:cNvPr id="30" name="Rounded Rectangle 29"/>
+          <p:cNvPr id="29" name="Rounded Rectangle 28"/>
           <p:cNvSpPr/>
           <p:nvPr/>
         </p:nvSpPr>
@@ -14284,7 +14108,7 @@
       </p:sp>
       <p:sp>
         <p:nvSpPr>
-          <p:cNvPr id="31" name="TextBox 30"/>
+          <p:cNvPr id="30" name="TextBox 29"/>
           <p:cNvSpPr txBox="1"/>
           <p:nvPr/>
         </p:nvSpPr>
@@ -14331,7 +14155,7 @@
       </p:sp>
       <p:sp>
         <p:nvSpPr>
-          <p:cNvPr id="32" name="TextBox 31"/>
+          <p:cNvPr id="31" name="TextBox 30"/>
           <p:cNvSpPr txBox="1"/>
           <p:nvPr/>
         </p:nvSpPr>
@@ -14532,53 +14356,9 @@
           </a:p>
         </p:txBody>
       </p:sp>
-      <p:sp>
-        <p:nvSpPr>
-          <p:cNvPr id="5" name="Rectangle 4"/>
-          <p:cNvSpPr/>
-          <p:nvPr/>
-        </p:nvSpPr>
-        <p:spPr>
-          <a:xfrm>
-            <a:off x="566928" y="1126998"/>
-            <a:ext cx="1097280" cy="45720"/>
-          </a:xfrm>
-          <a:prstGeom prst="rect">
-            <a:avLst/>
-          </a:prstGeom>
-          <a:solidFill>
-            <a:srgbClr val="E1542A"/>
-          </a:solidFill>
-          <a:ln>
-            <a:noFill/>
-          </a:ln>
-          <a:effectLst/>
-        </p:spPr>
-        <p:style>
-          <a:lnRef idx="1">
-            <a:schemeClr val="accent1"/>
-          </a:lnRef>
-          <a:fillRef idx="3">
-            <a:schemeClr val="accent1"/>
-          </a:fillRef>
-          <a:effectRef idx="2">
-            <a:schemeClr val="accent1"/>
-          </a:effectRef>
-          <a:fontRef idx="minor">
-            <a:schemeClr val="lt1"/>
-          </a:fontRef>
-        </p:style>
-        <p:txBody>
-          <a:bodyPr rtlCol="0" anchor="ctr"/>
-          <a:lstStyle/>
-          <a:p>
-            <a:pPr algn="ctr"/>
-          </a:p>
-        </p:txBody>
-      </p:sp>
       <p:cxnSp>
         <p:nvCxnSpPr>
-          <p:cNvPr id="6" name="Connector 5"/>
+          <p:cNvPr id="5" name="Connector 4"/>
           <p:cNvCxnSpPr/>
           <p:nvPr/>
         </p:nvCxnSpPr>
@@ -14615,7 +14395,7 @@
       </p:cxnSp>
       <p:cxnSp>
         <p:nvCxnSpPr>
-          <p:cNvPr id="7" name="Connector 6"/>
+          <p:cNvPr id="6" name="Connector 5"/>
           <p:cNvCxnSpPr/>
           <p:nvPr/>
         </p:nvCxnSpPr>
@@ -14652,7 +14432,7 @@
       </p:cxnSp>
       <p:cxnSp>
         <p:nvCxnSpPr>
-          <p:cNvPr id="8" name="Connector 7"/>
+          <p:cNvPr id="7" name="Connector 6"/>
           <p:cNvCxnSpPr/>
           <p:nvPr/>
         </p:nvCxnSpPr>
@@ -14689,7 +14469,7 @@
       </p:cxnSp>
       <p:cxnSp>
         <p:nvCxnSpPr>
-          <p:cNvPr id="9" name="Connector 8"/>
+          <p:cNvPr id="8" name="Connector 7"/>
           <p:cNvCxnSpPr/>
           <p:nvPr/>
         </p:nvCxnSpPr>
@@ -14726,7 +14506,7 @@
       </p:cxnSp>
       <p:cxnSp>
         <p:nvCxnSpPr>
-          <p:cNvPr id="10" name="Connector 9"/>
+          <p:cNvPr id="9" name="Connector 8"/>
           <p:cNvCxnSpPr/>
           <p:nvPr/>
         </p:nvCxnSpPr>
@@ -14763,7 +14543,7 @@
       </p:cxnSp>
       <p:cxnSp>
         <p:nvCxnSpPr>
-          <p:cNvPr id="11" name="Connector 10"/>
+          <p:cNvPr id="10" name="Connector 9"/>
           <p:cNvCxnSpPr/>
           <p:nvPr/>
         </p:nvCxnSpPr>
@@ -14800,7 +14580,7 @@
       </p:cxnSp>
       <p:sp>
         <p:nvSpPr>
-          <p:cNvPr id="12" name="Rounded Rectangle 11"/>
+          <p:cNvPr id="11" name="Rounded Rectangle 10"/>
           <p:cNvSpPr/>
           <p:nvPr/>
         </p:nvSpPr>
@@ -14846,7 +14626,7 @@
       </p:sp>
       <p:sp>
         <p:nvSpPr>
-          <p:cNvPr id="13" name="TextBox 12"/>
+          <p:cNvPr id="12" name="TextBox 11"/>
           <p:cNvSpPr txBox="1"/>
           <p:nvPr/>
         </p:nvSpPr>
@@ -14916,7 +14696,7 @@
       </p:sp>
       <p:sp>
         <p:nvSpPr>
-          <p:cNvPr id="14" name="Rounded Rectangle 13"/>
+          <p:cNvPr id="13" name="Rounded Rectangle 12"/>
           <p:cNvSpPr/>
           <p:nvPr/>
         </p:nvSpPr>
@@ -14962,7 +14742,7 @@
       </p:sp>
       <p:sp>
         <p:nvSpPr>
-          <p:cNvPr id="15" name="TextBox 14"/>
+          <p:cNvPr id="14" name="TextBox 13"/>
           <p:cNvSpPr txBox="1"/>
           <p:nvPr/>
         </p:nvSpPr>
@@ -15032,7 +14812,7 @@
       </p:sp>
       <p:sp>
         <p:nvSpPr>
-          <p:cNvPr id="16" name="Rounded Rectangle 15"/>
+          <p:cNvPr id="15" name="Rounded Rectangle 14"/>
           <p:cNvSpPr/>
           <p:nvPr/>
         </p:nvSpPr>
@@ -15078,7 +14858,7 @@
       </p:sp>
       <p:sp>
         <p:nvSpPr>
-          <p:cNvPr id="17" name="TextBox 16"/>
+          <p:cNvPr id="16" name="TextBox 15"/>
           <p:cNvSpPr txBox="1"/>
           <p:nvPr/>
         </p:nvSpPr>
@@ -15148,7 +14928,7 @@
       </p:sp>
       <p:sp>
         <p:nvSpPr>
-          <p:cNvPr id="18" name="Rounded Rectangle 17"/>
+          <p:cNvPr id="17" name="Rounded Rectangle 16"/>
           <p:cNvSpPr/>
           <p:nvPr/>
         </p:nvSpPr>
@@ -15194,7 +14974,7 @@
       </p:sp>
       <p:sp>
         <p:nvSpPr>
-          <p:cNvPr id="19" name="TextBox 18"/>
+          <p:cNvPr id="18" name="TextBox 17"/>
           <p:cNvSpPr txBox="1"/>
           <p:nvPr/>
         </p:nvSpPr>
@@ -15264,7 +15044,7 @@
       </p:sp>
       <p:sp>
         <p:nvSpPr>
-          <p:cNvPr id="20" name="Rounded Rectangle 19"/>
+          <p:cNvPr id="19" name="Rounded Rectangle 18"/>
           <p:cNvSpPr/>
           <p:nvPr/>
         </p:nvSpPr>
@@ -15310,7 +15090,7 @@
       </p:sp>
       <p:sp>
         <p:nvSpPr>
-          <p:cNvPr id="21" name="TextBox 20"/>
+          <p:cNvPr id="20" name="TextBox 19"/>
           <p:cNvSpPr txBox="1"/>
           <p:nvPr/>
         </p:nvSpPr>
@@ -15380,7 +15160,7 @@
       </p:sp>
       <p:sp>
         <p:nvSpPr>
-          <p:cNvPr id="22" name="Rounded Rectangle 21"/>
+          <p:cNvPr id="21" name="Rounded Rectangle 20"/>
           <p:cNvSpPr/>
           <p:nvPr/>
         </p:nvSpPr>
@@ -15426,7 +15206,7 @@
       </p:sp>
       <p:sp>
         <p:nvSpPr>
-          <p:cNvPr id="23" name="TextBox 22"/>
+          <p:cNvPr id="22" name="TextBox 21"/>
           <p:cNvSpPr txBox="1"/>
           <p:nvPr/>
         </p:nvSpPr>
@@ -15496,7 +15276,7 @@
       </p:sp>
       <p:sp>
         <p:nvSpPr>
-          <p:cNvPr id="24" name="Rounded Rectangle 23"/>
+          <p:cNvPr id="23" name="Rounded Rectangle 22"/>
           <p:cNvSpPr/>
           <p:nvPr/>
         </p:nvSpPr>
@@ -15542,7 +15322,7 @@
       </p:sp>
       <p:sp>
         <p:nvSpPr>
-          <p:cNvPr id="25" name="TextBox 24"/>
+          <p:cNvPr id="24" name="TextBox 23"/>
           <p:cNvSpPr txBox="1"/>
           <p:nvPr/>
         </p:nvSpPr>
@@ -15589,7 +15369,7 @@
       </p:sp>
       <p:sp>
         <p:nvSpPr>
-          <p:cNvPr id="26" name="TextBox 25"/>
+          <p:cNvPr id="25" name="TextBox 24"/>
           <p:cNvSpPr txBox="1"/>
           <p:nvPr/>
         </p:nvSpPr>
@@ -15812,51 +15592,7 @@
       </p:sp>
       <p:sp>
         <p:nvSpPr>
-          <p:cNvPr id="5" name="Rectangle 4"/>
-          <p:cNvSpPr/>
-          <p:nvPr/>
-        </p:nvSpPr>
-        <p:spPr>
-          <a:xfrm>
-            <a:off x="566928" y="1191006"/>
-            <a:ext cx="1097280" cy="45720"/>
-          </a:xfrm>
-          <a:prstGeom prst="rect">
-            <a:avLst/>
-          </a:prstGeom>
-          <a:solidFill>
-            <a:srgbClr val="E1542A"/>
-          </a:solidFill>
-          <a:ln>
-            <a:noFill/>
-          </a:ln>
-          <a:effectLst/>
-        </p:spPr>
-        <p:style>
-          <a:lnRef idx="1">
-            <a:schemeClr val="accent1"/>
-          </a:lnRef>
-          <a:fillRef idx="3">
-            <a:schemeClr val="accent1"/>
-          </a:fillRef>
-          <a:effectRef idx="2">
-            <a:schemeClr val="accent1"/>
-          </a:effectRef>
-          <a:fontRef idx="minor">
-            <a:schemeClr val="lt1"/>
-          </a:fontRef>
-        </p:style>
-        <p:txBody>
-          <a:bodyPr rtlCol="0" anchor="ctr"/>
-          <a:lstStyle/>
-          <a:p>
-            <a:pPr algn="ctr"/>
-          </a:p>
-        </p:txBody>
-      </p:sp>
-      <p:sp>
-        <p:nvSpPr>
-          <p:cNvPr id="6" name="TextBox 5"/>
+          <p:cNvPr id="5" name="TextBox 4"/>
           <p:cNvSpPr txBox="1"/>
           <p:nvPr/>
         </p:nvSpPr>
@@ -15903,7 +15639,7 @@
       </p:sp>
       <p:sp>
         <p:nvSpPr>
-          <p:cNvPr id="7" name="Rounded Rectangle 6"/>
+          <p:cNvPr id="6" name="Rounded Rectangle 5"/>
           <p:cNvSpPr/>
           <p:nvPr/>
         </p:nvSpPr>
@@ -15949,7 +15685,7 @@
       </p:sp>
       <p:sp>
         <p:nvSpPr>
-          <p:cNvPr id="8" name="TextBox 7"/>
+          <p:cNvPr id="7" name="TextBox 6"/>
           <p:cNvSpPr txBox="1"/>
           <p:nvPr/>
         </p:nvSpPr>
@@ -16019,7 +15755,7 @@
       </p:sp>
       <p:sp>
         <p:nvSpPr>
-          <p:cNvPr id="9" name="Rounded Rectangle 8"/>
+          <p:cNvPr id="8" name="Rounded Rectangle 7"/>
           <p:cNvSpPr/>
           <p:nvPr/>
         </p:nvSpPr>
@@ -16065,7 +15801,7 @@
       </p:sp>
       <p:sp>
         <p:nvSpPr>
-          <p:cNvPr id="10" name="TextBox 9"/>
+          <p:cNvPr id="9" name="TextBox 8"/>
           <p:cNvSpPr txBox="1"/>
           <p:nvPr/>
         </p:nvSpPr>
@@ -16135,7 +15871,7 @@
       </p:sp>
       <p:cxnSp>
         <p:nvCxnSpPr>
-          <p:cNvPr id="11" name="Connector 10"/>
+          <p:cNvPr id="10" name="Connector 9"/>
           <p:cNvCxnSpPr/>
           <p:nvPr/>
         </p:nvCxnSpPr>
@@ -16172,7 +15908,7 @@
       </p:cxnSp>
       <p:sp>
         <p:nvSpPr>
-          <p:cNvPr id="12" name="Rounded Rectangle 11"/>
+          <p:cNvPr id="11" name="Rounded Rectangle 10"/>
           <p:cNvSpPr/>
           <p:nvPr/>
         </p:nvSpPr>
@@ -16218,7 +15954,7 @@
       </p:sp>
       <p:sp>
         <p:nvSpPr>
-          <p:cNvPr id="13" name="TextBox 12"/>
+          <p:cNvPr id="12" name="TextBox 11"/>
           <p:cNvSpPr txBox="1"/>
           <p:nvPr/>
         </p:nvSpPr>
@@ -16288,7 +16024,7 @@
       </p:sp>
       <p:cxnSp>
         <p:nvCxnSpPr>
-          <p:cNvPr id="14" name="Connector 13"/>
+          <p:cNvPr id="13" name="Connector 12"/>
           <p:cNvCxnSpPr/>
           <p:nvPr/>
         </p:nvCxnSpPr>
@@ -16325,7 +16061,7 @@
       </p:cxnSp>
       <p:sp>
         <p:nvSpPr>
-          <p:cNvPr id="15" name="Rounded Rectangle 14"/>
+          <p:cNvPr id="14" name="Rounded Rectangle 13"/>
           <p:cNvSpPr/>
           <p:nvPr/>
         </p:nvSpPr>
@@ -16369,7 +16105,7 @@
       </p:sp>
       <p:sp>
         <p:nvSpPr>
-          <p:cNvPr id="16" name="TextBox 15"/>
+          <p:cNvPr id="15" name="TextBox 14"/>
           <p:cNvSpPr txBox="1"/>
           <p:nvPr/>
         </p:nvSpPr>
@@ -16439,7 +16175,7 @@
       </p:sp>
       <p:cxnSp>
         <p:nvCxnSpPr>
-          <p:cNvPr id="17" name="Connector 16"/>
+          <p:cNvPr id="16" name="Connector 15"/>
           <p:cNvCxnSpPr/>
           <p:nvPr/>
         </p:nvCxnSpPr>
@@ -16476,7 +16212,7 @@
       </p:cxnSp>
       <p:sp>
         <p:nvSpPr>
-          <p:cNvPr id="18" name="Rounded Rectangle 17"/>
+          <p:cNvPr id="17" name="Rounded Rectangle 16"/>
           <p:cNvSpPr/>
           <p:nvPr/>
         </p:nvSpPr>
@@ -16522,7 +16258,7 @@
       </p:sp>
       <p:sp>
         <p:nvSpPr>
-          <p:cNvPr id="19" name="TextBox 18"/>
+          <p:cNvPr id="18" name="TextBox 17"/>
           <p:cNvSpPr txBox="1"/>
           <p:nvPr/>
         </p:nvSpPr>
@@ -16592,7 +16328,7 @@
       </p:sp>
       <p:cxnSp>
         <p:nvCxnSpPr>
-          <p:cNvPr id="20" name="Connector 19"/>
+          <p:cNvPr id="19" name="Connector 18"/>
           <p:cNvCxnSpPr/>
           <p:nvPr/>
         </p:nvCxnSpPr>
@@ -16629,7 +16365,7 @@
       </p:cxnSp>
       <p:cxnSp>
         <p:nvCxnSpPr>
-          <p:cNvPr id="21" name="Connector 20"/>
+          <p:cNvPr id="20" name="Connector 19"/>
           <p:cNvCxnSpPr/>
           <p:nvPr/>
         </p:nvCxnSpPr>
@@ -16666,7 +16402,7 @@
       </p:cxnSp>
       <p:cxnSp>
         <p:nvCxnSpPr>
-          <p:cNvPr id="22" name="Connector 21"/>
+          <p:cNvPr id="21" name="Connector 20"/>
           <p:cNvCxnSpPr/>
           <p:nvPr/>
         </p:nvCxnSpPr>
@@ -16703,7 +16439,7 @@
       </p:cxnSp>
       <p:cxnSp>
         <p:nvCxnSpPr>
-          <p:cNvPr id="23" name="Connector 22"/>
+          <p:cNvPr id="22" name="Connector 21"/>
           <p:cNvCxnSpPr/>
           <p:nvPr/>
         </p:nvCxnSpPr>
@@ -16741,7 +16477,7 @@
       </p:cxnSp>
       <p:sp>
         <p:nvSpPr>
-          <p:cNvPr id="24" name="TextBox 23"/>
+          <p:cNvPr id="23" name="TextBox 22"/>
           <p:cNvSpPr txBox="1"/>
           <p:nvPr/>
         </p:nvSpPr>
@@ -16788,7 +16524,7 @@
       </p:sp>
       <p:sp>
         <p:nvSpPr>
-          <p:cNvPr id="25" name="Rounded Rectangle 24"/>
+          <p:cNvPr id="24" name="Rounded Rectangle 23"/>
           <p:cNvSpPr/>
           <p:nvPr/>
         </p:nvSpPr>
@@ -16834,7 +16570,7 @@
       </p:sp>
       <p:sp>
         <p:nvSpPr>
-          <p:cNvPr id="26" name="Rectangle 25"/>
+          <p:cNvPr id="25" name="Rectangle 24"/>
           <p:cNvSpPr/>
           <p:nvPr/>
         </p:nvSpPr>
@@ -16878,7 +16614,7 @@
       </p:sp>
       <p:sp>
         <p:nvSpPr>
-          <p:cNvPr id="27" name="TextBox 26"/>
+          <p:cNvPr id="26" name="TextBox 25"/>
           <p:cNvSpPr txBox="1"/>
           <p:nvPr/>
         </p:nvSpPr>
@@ -16935,7 +16671,7 @@
       </p:sp>
       <p:cxnSp>
         <p:nvCxnSpPr>
-          <p:cNvPr id="28" name="Connector 27"/>
+          <p:cNvPr id="27" name="Connector 26"/>
           <p:cNvCxnSpPr/>
           <p:nvPr/>
         </p:nvCxnSpPr>
@@ -16943,6 +16679,42 @@
           <a:xfrm flipV="1">
             <a:off x="8284464" y="4736592"/>
             <a:ext cx="0" cy="137160"/>
+          </a:xfrm>
+          <a:prstGeom prst="line">
+            <a:avLst/>
+          </a:prstGeom>
+          <a:ln w="9525">
+            <a:solidFill>
+              <a:srgbClr val="D9D3C6"/>
+            </a:solidFill>
+          </a:ln>
+          <a:effectLst/>
+        </p:spPr>
+        <p:style>
+          <a:lnRef idx="2">
+            <a:schemeClr val="accent1"/>
+          </a:lnRef>
+          <a:fillRef idx="0">
+            <a:schemeClr val="accent1"/>
+          </a:fillRef>
+          <a:effectRef idx="1">
+            <a:schemeClr val="accent1"/>
+          </a:effectRef>
+          <a:fontRef idx="minor">
+            <a:schemeClr val="tx1"/>
+          </a:fontRef>
+        </p:style>
+      </p:cxnSp>
+      <p:cxnSp>
+        <p:nvCxnSpPr>
+          <p:cNvPr id="28" name="Connector 27"/>
+          <p:cNvCxnSpPr/>
+          <p:nvPr/>
+        </p:nvCxnSpPr>
+        <p:spPr>
+          <a:xfrm flipV="1">
+            <a:off x="8284464" y="4805172"/>
+            <a:ext cx="118784" cy="68580"/>
           </a:xfrm>
           <a:prstGeom prst="line">
             <a:avLst/>
@@ -16976,8 +16748,8 @@
           <p:nvPr/>
         </p:nvCxnSpPr>
         <p:spPr>
-          <a:xfrm flipV="1">
-            <a:off x="8284464" y="4805172"/>
+          <a:xfrm>
+            <a:off x="8284464" y="4873752"/>
             <a:ext cx="118784" cy="68580"/>
           </a:xfrm>
           <a:prstGeom prst="line">
@@ -17014,7 +16786,7 @@
         <p:spPr>
           <a:xfrm>
             <a:off x="8284464" y="4873752"/>
-            <a:ext cx="118784" cy="68580"/>
+            <a:ext cx="0" cy="137160"/>
           </a:xfrm>
           <a:prstGeom prst="line">
             <a:avLst/>
@@ -17048,9 +16820,9 @@
           <p:nvPr/>
         </p:nvCxnSpPr>
         <p:spPr>
-          <a:xfrm>
-            <a:off x="8284464" y="4873752"/>
-            <a:ext cx="0" cy="137160"/>
+          <a:xfrm flipH="1">
+            <a:off x="8165679" y="4873752"/>
+            <a:ext cx="118785" cy="68580"/>
           </a:xfrm>
           <a:prstGeom prst="line">
             <a:avLst/>
@@ -17084,8 +16856,8 @@
           <p:nvPr/>
         </p:nvCxnSpPr>
         <p:spPr>
-          <a:xfrm flipH="1">
-            <a:off x="8165679" y="4873752"/>
+          <a:xfrm flipH="1" flipV="1">
+            <a:off x="8165679" y="4805172"/>
             <a:ext cx="118785" cy="68580"/>
           </a:xfrm>
           <a:prstGeom prst="line">
@@ -17113,45 +16885,9 @@
           </a:fontRef>
         </p:style>
       </p:cxnSp>
-      <p:cxnSp>
-        <p:nvCxnSpPr>
-          <p:cNvPr id="33" name="Connector 32"/>
-          <p:cNvCxnSpPr/>
-          <p:nvPr/>
-        </p:nvCxnSpPr>
-        <p:spPr>
-          <a:xfrm flipH="1" flipV="1">
-            <a:off x="8165679" y="4805172"/>
-            <a:ext cx="118785" cy="68580"/>
-          </a:xfrm>
-          <a:prstGeom prst="line">
-            <a:avLst/>
-          </a:prstGeom>
-          <a:ln w="9525">
-            <a:solidFill>
-              <a:srgbClr val="D9D3C6"/>
-            </a:solidFill>
-          </a:ln>
-          <a:effectLst/>
-        </p:spPr>
-        <p:style>
-          <a:lnRef idx="2">
-            <a:schemeClr val="accent1"/>
-          </a:lnRef>
-          <a:fillRef idx="0">
-            <a:schemeClr val="accent1"/>
-          </a:fillRef>
-          <a:effectRef idx="1">
-            <a:schemeClr val="accent1"/>
-          </a:effectRef>
-          <a:fontRef idx="minor">
-            <a:schemeClr val="tx1"/>
-          </a:fontRef>
-        </p:style>
-      </p:cxnSp>
-      <p:sp>
-        <p:nvSpPr>
-          <p:cNvPr id="34" name="Rounded Rectangle 33"/>
+      <p:sp>
+        <p:nvSpPr>
+          <p:cNvPr id="33" name="Rounded Rectangle 32"/>
           <p:cNvSpPr/>
           <p:nvPr/>
         </p:nvSpPr>
@@ -17197,7 +16933,7 @@
       </p:sp>
       <p:sp>
         <p:nvSpPr>
-          <p:cNvPr id="35" name="Rounded Rectangle 34"/>
+          <p:cNvPr id="34" name="Rounded Rectangle 33"/>
           <p:cNvSpPr/>
           <p:nvPr/>
         </p:nvSpPr>
@@ -17243,7 +16979,7 @@
       </p:sp>
       <p:sp>
         <p:nvSpPr>
-          <p:cNvPr id="36" name="Rounded Rectangle 35"/>
+          <p:cNvPr id="35" name="Rounded Rectangle 34"/>
           <p:cNvSpPr/>
           <p:nvPr/>
         </p:nvSpPr>
@@ -17289,7 +17025,7 @@
       </p:sp>
       <p:sp>
         <p:nvSpPr>
-          <p:cNvPr id="37" name="Rounded Rectangle 36"/>
+          <p:cNvPr id="36" name="Rounded Rectangle 35"/>
           <p:cNvSpPr/>
           <p:nvPr/>
         </p:nvSpPr>
@@ -17335,7 +17071,7 @@
       </p:sp>
       <p:sp>
         <p:nvSpPr>
-          <p:cNvPr id="38" name="Rounded Rectangle 37"/>
+          <p:cNvPr id="37" name="Rounded Rectangle 36"/>
           <p:cNvSpPr/>
           <p:nvPr/>
         </p:nvSpPr>
@@ -17381,7 +17117,7 @@
       </p:sp>
       <p:sp>
         <p:nvSpPr>
-          <p:cNvPr id="39" name="Rounded Rectangle 38"/>
+          <p:cNvPr id="38" name="Rounded Rectangle 37"/>
           <p:cNvSpPr/>
           <p:nvPr/>
         </p:nvSpPr>
@@ -17427,7 +17163,7 @@
       </p:sp>
       <p:sp>
         <p:nvSpPr>
-          <p:cNvPr id="40" name="Rounded Rectangle 39"/>
+          <p:cNvPr id="39" name="Rounded Rectangle 38"/>
           <p:cNvSpPr/>
           <p:nvPr/>
         </p:nvSpPr>
@@ -17473,7 +17209,7 @@
       </p:sp>
       <p:sp>
         <p:nvSpPr>
-          <p:cNvPr id="41" name="TextBox 40"/>
+          <p:cNvPr id="40" name="TextBox 39"/>
           <p:cNvSpPr txBox="1"/>
           <p:nvPr/>
         </p:nvSpPr>
@@ -17520,7 +17256,7 @@
       </p:sp>
       <p:sp>
         <p:nvSpPr>
-          <p:cNvPr id="42" name="TextBox 41"/>
+          <p:cNvPr id="41" name="TextBox 40"/>
           <p:cNvSpPr txBox="1"/>
           <p:nvPr/>
         </p:nvSpPr>
@@ -17723,14 +17459,60 @@
       </p:sp>
       <p:sp>
         <p:nvSpPr>
-          <p:cNvPr id="5" name="Rectangle 4"/>
+          <p:cNvPr id="5" name="Rounded Rectangle 4"/>
           <p:cNvSpPr/>
           <p:nvPr/>
         </p:nvSpPr>
         <p:spPr>
           <a:xfrm>
-            <a:off x="566928" y="1191006"/>
-            <a:ext cx="1097280" cy="45720"/>
+            <a:off x="548640" y="4050791"/>
+            <a:ext cx="8046720" cy="498347"/>
+          </a:xfrm>
+          <a:prstGeom prst="roundRect">
+            <a:avLst>
+              <a:gd name="adj" fmla="val 8000"/>
+            </a:avLst>
+          </a:prstGeom>
+          <a:solidFill>
+            <a:srgbClr val="EAF3FA"/>
+          </a:solidFill>
+          <a:ln>
+            <a:noFill/>
+          </a:ln>
+          <a:effectLst/>
+        </p:spPr>
+        <p:style>
+          <a:lnRef idx="1">
+            <a:schemeClr val="accent1"/>
+          </a:lnRef>
+          <a:fillRef idx="3">
+            <a:schemeClr val="accent1"/>
+          </a:fillRef>
+          <a:effectRef idx="2">
+            <a:schemeClr val="accent1"/>
+          </a:effectRef>
+          <a:fontRef idx="minor">
+            <a:schemeClr val="lt1"/>
+          </a:fontRef>
+        </p:style>
+        <p:txBody>
+          <a:bodyPr rtlCol="0" anchor="ctr"/>
+          <a:lstStyle/>
+          <a:p>
+            <a:pPr algn="ctr"/>
+          </a:p>
+        </p:txBody>
+      </p:sp>
+      <p:sp>
+        <p:nvSpPr>
+          <p:cNvPr id="6" name="Rectangle 5"/>
+          <p:cNvSpPr/>
+          <p:nvPr/>
+        </p:nvSpPr>
+        <p:spPr>
+          <a:xfrm>
+            <a:off x="548640" y="4090659"/>
+            <a:ext cx="64008" cy="418612"/>
           </a:xfrm>
           <a:prstGeom prst="rect">
             <a:avLst/>
@@ -17767,97 +17549,7 @@
       </p:sp>
       <p:sp>
         <p:nvSpPr>
-          <p:cNvPr id="6" name="Rounded Rectangle 5"/>
-          <p:cNvSpPr/>
-          <p:nvPr/>
-        </p:nvSpPr>
-        <p:spPr>
-          <a:xfrm>
-            <a:off x="548640" y="4050791"/>
-            <a:ext cx="8046720" cy="498347"/>
-          </a:xfrm>
-          <a:prstGeom prst="roundRect">
-            <a:avLst>
-              <a:gd name="adj" fmla="val 8000"/>
-            </a:avLst>
-          </a:prstGeom>
-          <a:solidFill>
-            <a:srgbClr val="EAF3FA"/>
-          </a:solidFill>
-          <a:ln>
-            <a:noFill/>
-          </a:ln>
-          <a:effectLst/>
-        </p:spPr>
-        <p:style>
-          <a:lnRef idx="1">
-            <a:schemeClr val="accent1"/>
-          </a:lnRef>
-          <a:fillRef idx="3">
-            <a:schemeClr val="accent1"/>
-          </a:fillRef>
-          <a:effectRef idx="2">
-            <a:schemeClr val="accent1"/>
-          </a:effectRef>
-          <a:fontRef idx="minor">
-            <a:schemeClr val="lt1"/>
-          </a:fontRef>
-        </p:style>
-        <p:txBody>
-          <a:bodyPr rtlCol="0" anchor="ctr"/>
-          <a:lstStyle/>
-          <a:p>
-            <a:pPr algn="ctr"/>
-          </a:p>
-        </p:txBody>
-      </p:sp>
-      <p:sp>
-        <p:nvSpPr>
-          <p:cNvPr id="7" name="Rectangle 6"/>
-          <p:cNvSpPr/>
-          <p:nvPr/>
-        </p:nvSpPr>
-        <p:spPr>
-          <a:xfrm>
-            <a:off x="548640" y="4090659"/>
-            <a:ext cx="64008" cy="418612"/>
-          </a:xfrm>
-          <a:prstGeom prst="rect">
-            <a:avLst/>
-          </a:prstGeom>
-          <a:solidFill>
-            <a:srgbClr val="E1542A"/>
-          </a:solidFill>
-          <a:ln>
-            <a:noFill/>
-          </a:ln>
-          <a:effectLst/>
-        </p:spPr>
-        <p:style>
-          <a:lnRef idx="1">
-            <a:schemeClr val="accent1"/>
-          </a:lnRef>
-          <a:fillRef idx="3">
-            <a:schemeClr val="accent1"/>
-          </a:fillRef>
-          <a:effectRef idx="2">
-            <a:schemeClr val="accent1"/>
-          </a:effectRef>
-          <a:fontRef idx="minor">
-            <a:schemeClr val="lt1"/>
-          </a:fontRef>
-        </p:style>
-        <p:txBody>
-          <a:bodyPr rtlCol="0" anchor="ctr"/>
-          <a:lstStyle/>
-          <a:p>
-            <a:pPr algn="ctr"/>
-          </a:p>
-        </p:txBody>
-      </p:sp>
-      <p:sp>
-        <p:nvSpPr>
-          <p:cNvPr id="8" name="TextBox 7"/>
+          <p:cNvPr id="7" name="TextBox 6"/>
           <p:cNvSpPr txBox="1"/>
           <p:nvPr/>
         </p:nvSpPr>
@@ -17914,7 +17606,7 @@
       </p:sp>
       <p:sp>
         <p:nvSpPr>
-          <p:cNvPr id="9" name="Rounded Rectangle 8"/>
+          <p:cNvPr id="8" name="Rounded Rectangle 7"/>
           <p:cNvSpPr/>
           <p:nvPr/>
         </p:nvSpPr>
@@ -17960,7 +17652,7 @@
       </p:sp>
       <p:pic>
         <p:nvPicPr>
-          <p:cNvPr id="10" name="Picture 9" descr="message-square_168581.png"/>
+          <p:cNvPr id="9" name="Picture 8" descr="message-square_168581.png"/>
           <p:cNvPicPr>
             <a:picLocks noChangeAspect="1"/>
           </p:cNvPicPr>
@@ -17984,7 +17676,7 @@
       </p:pic>
       <p:sp>
         <p:nvSpPr>
-          <p:cNvPr id="11" name="TextBox 10"/>
+          <p:cNvPr id="10" name="TextBox 9"/>
           <p:cNvSpPr txBox="1"/>
           <p:nvPr/>
         </p:nvSpPr>
@@ -18031,7 +17723,7 @@
       </p:sp>
       <p:sp>
         <p:nvSpPr>
-          <p:cNvPr id="12" name="TextBox 11"/>
+          <p:cNvPr id="11" name="TextBox 10"/>
           <p:cNvSpPr txBox="1"/>
           <p:nvPr/>
         </p:nvSpPr>
@@ -18078,7 +17770,7 @@
       </p:sp>
       <p:sp>
         <p:nvSpPr>
-          <p:cNvPr id="13" name="Rounded Rectangle 12"/>
+          <p:cNvPr id="12" name="Rounded Rectangle 11"/>
           <p:cNvSpPr/>
           <p:nvPr/>
         </p:nvSpPr>
@@ -18124,7 +17816,7 @@
       </p:sp>
       <p:pic>
         <p:nvPicPr>
-          <p:cNvPr id="14" name="Picture 13" descr="terminal_168581.png"/>
+          <p:cNvPr id="13" name="Picture 12" descr="terminal_168581.png"/>
           <p:cNvPicPr>
             <a:picLocks noChangeAspect="1"/>
           </p:cNvPicPr>
@@ -18148,7 +17840,7 @@
       </p:pic>
       <p:sp>
         <p:nvSpPr>
-          <p:cNvPr id="15" name="TextBox 14"/>
+          <p:cNvPr id="14" name="TextBox 13"/>
           <p:cNvSpPr txBox="1"/>
           <p:nvPr/>
         </p:nvSpPr>
@@ -18195,7 +17887,7 @@
       </p:sp>
       <p:sp>
         <p:nvSpPr>
-          <p:cNvPr id="16" name="TextBox 15"/>
+          <p:cNvPr id="15" name="TextBox 14"/>
           <p:cNvSpPr txBox="1"/>
           <p:nvPr/>
         </p:nvSpPr>
@@ -18242,7 +17934,7 @@
       </p:sp>
       <p:sp>
         <p:nvSpPr>
-          <p:cNvPr id="17" name="Rounded Rectangle 16"/>
+          <p:cNvPr id="16" name="Rounded Rectangle 15"/>
           <p:cNvSpPr/>
           <p:nvPr/>
         </p:nvSpPr>
@@ -18288,7 +17980,7 @@
       </p:sp>
       <p:pic>
         <p:nvPicPr>
-          <p:cNvPr id="18" name="Picture 17" descr="palette_168581.png"/>
+          <p:cNvPr id="17" name="Picture 16" descr="palette_168581.png"/>
           <p:cNvPicPr>
             <a:picLocks noChangeAspect="1"/>
           </p:cNvPicPr>
@@ -18312,7 +18004,7 @@
       </p:pic>
       <p:sp>
         <p:nvSpPr>
-          <p:cNvPr id="19" name="TextBox 18"/>
+          <p:cNvPr id="18" name="TextBox 17"/>
           <p:cNvSpPr txBox="1"/>
           <p:nvPr/>
         </p:nvSpPr>
@@ -18359,7 +18051,7 @@
       </p:sp>
       <p:sp>
         <p:nvSpPr>
-          <p:cNvPr id="20" name="TextBox 19"/>
+          <p:cNvPr id="19" name="TextBox 18"/>
           <p:cNvSpPr txBox="1"/>
           <p:nvPr/>
         </p:nvSpPr>
@@ -18406,7 +18098,7 @@
       </p:sp>
       <p:sp>
         <p:nvSpPr>
-          <p:cNvPr id="21" name="Rounded Rectangle 20"/>
+          <p:cNvPr id="20" name="Rounded Rectangle 19"/>
           <p:cNvSpPr/>
           <p:nvPr/>
         </p:nvSpPr>
@@ -18452,7 +18144,7 @@
       </p:sp>
       <p:pic>
         <p:nvPicPr>
-          <p:cNvPr id="22" name="Picture 21" descr="workflow_168581.png"/>
+          <p:cNvPr id="21" name="Picture 20" descr="workflow_168581.png"/>
           <p:cNvPicPr>
             <a:picLocks noChangeAspect="1"/>
           </p:cNvPicPr>
@@ -18476,7 +18168,7 @@
       </p:pic>
       <p:sp>
         <p:nvSpPr>
-          <p:cNvPr id="23" name="TextBox 22"/>
+          <p:cNvPr id="22" name="TextBox 21"/>
           <p:cNvSpPr txBox="1"/>
           <p:nvPr/>
         </p:nvSpPr>
@@ -18523,7 +18215,7 @@
       </p:sp>
       <p:sp>
         <p:nvSpPr>
-          <p:cNvPr id="24" name="TextBox 23"/>
+          <p:cNvPr id="23" name="TextBox 22"/>
           <p:cNvSpPr txBox="1"/>
           <p:nvPr/>
         </p:nvSpPr>
@@ -18570,7 +18262,7 @@
       </p:sp>
       <p:sp>
         <p:nvSpPr>
-          <p:cNvPr id="25" name="Rounded Rectangle 24"/>
+          <p:cNvPr id="24" name="Rounded Rectangle 23"/>
           <p:cNvSpPr/>
           <p:nvPr/>
         </p:nvSpPr>
@@ -18616,7 +18308,7 @@
       </p:sp>
       <p:pic>
         <p:nvPicPr>
-          <p:cNvPr id="26" name="Picture 25" descr="database_168581.png"/>
+          <p:cNvPr id="25" name="Picture 24" descr="database_168581.png"/>
           <p:cNvPicPr>
             <a:picLocks noChangeAspect="1"/>
           </p:cNvPicPr>
@@ -18640,7 +18332,7 @@
       </p:pic>
       <p:sp>
         <p:nvSpPr>
-          <p:cNvPr id="27" name="TextBox 26"/>
+          <p:cNvPr id="26" name="TextBox 25"/>
           <p:cNvSpPr txBox="1"/>
           <p:nvPr/>
         </p:nvSpPr>
@@ -18687,7 +18379,7 @@
       </p:sp>
       <p:sp>
         <p:nvSpPr>
-          <p:cNvPr id="28" name="TextBox 27"/>
+          <p:cNvPr id="27" name="TextBox 26"/>
           <p:cNvSpPr txBox="1"/>
           <p:nvPr/>
         </p:nvSpPr>
@@ -18734,7 +18426,7 @@
       </p:sp>
       <p:sp>
         <p:nvSpPr>
-          <p:cNvPr id="29" name="Rounded Rectangle 28"/>
+          <p:cNvPr id="28" name="Rounded Rectangle 27"/>
           <p:cNvSpPr/>
           <p:nvPr/>
         </p:nvSpPr>
@@ -18780,7 +18472,7 @@
       </p:sp>
       <p:pic>
         <p:nvPicPr>
-          <p:cNvPr id="30" name="Picture 29" descr="credit-card_168581.png"/>
+          <p:cNvPr id="29" name="Picture 28" descr="credit-card_168581.png"/>
           <p:cNvPicPr>
             <a:picLocks noChangeAspect="1"/>
           </p:cNvPicPr>
@@ -18804,7 +18496,7 @@
       </p:pic>
       <p:sp>
         <p:nvSpPr>
-          <p:cNvPr id="31" name="TextBox 30"/>
+          <p:cNvPr id="30" name="TextBox 29"/>
           <p:cNvSpPr txBox="1"/>
           <p:nvPr/>
         </p:nvSpPr>
@@ -18851,7 +18543,7 @@
       </p:sp>
       <p:sp>
         <p:nvSpPr>
-          <p:cNvPr id="32" name="TextBox 31"/>
+          <p:cNvPr id="31" name="TextBox 30"/>
           <p:cNvSpPr txBox="1"/>
           <p:nvPr/>
         </p:nvSpPr>
@@ -18898,7 +18590,7 @@
       </p:sp>
       <p:cxnSp>
         <p:nvCxnSpPr>
-          <p:cNvPr id="33" name="Connector 32"/>
+          <p:cNvPr id="32" name="Connector 31"/>
           <p:cNvCxnSpPr/>
           <p:nvPr/>
         </p:nvCxnSpPr>
@@ -18906,6 +18598,42 @@
           <a:xfrm flipV="1">
             <a:off x="8284464" y="4736592"/>
             <a:ext cx="0" cy="137160"/>
+          </a:xfrm>
+          <a:prstGeom prst="line">
+            <a:avLst/>
+          </a:prstGeom>
+          <a:ln w="9525">
+            <a:solidFill>
+              <a:srgbClr val="D9D3C6"/>
+            </a:solidFill>
+          </a:ln>
+          <a:effectLst/>
+        </p:spPr>
+        <p:style>
+          <a:lnRef idx="2">
+            <a:schemeClr val="accent1"/>
+          </a:lnRef>
+          <a:fillRef idx="0">
+            <a:schemeClr val="accent1"/>
+          </a:fillRef>
+          <a:effectRef idx="1">
+            <a:schemeClr val="accent1"/>
+          </a:effectRef>
+          <a:fontRef idx="minor">
+            <a:schemeClr val="tx1"/>
+          </a:fontRef>
+        </p:style>
+      </p:cxnSp>
+      <p:cxnSp>
+        <p:nvCxnSpPr>
+          <p:cNvPr id="33" name="Connector 32"/>
+          <p:cNvCxnSpPr/>
+          <p:nvPr/>
+        </p:nvCxnSpPr>
+        <p:spPr>
+          <a:xfrm flipV="1">
+            <a:off x="8284464" y="4805172"/>
+            <a:ext cx="118784" cy="68580"/>
           </a:xfrm>
           <a:prstGeom prst="line">
             <a:avLst/>
@@ -18939,8 +18667,8 @@
           <p:nvPr/>
         </p:nvCxnSpPr>
         <p:spPr>
-          <a:xfrm flipV="1">
-            <a:off x="8284464" y="4805172"/>
+          <a:xfrm>
+            <a:off x="8284464" y="4873752"/>
             <a:ext cx="118784" cy="68580"/>
           </a:xfrm>
           <a:prstGeom prst="line">
@@ -18977,7 +18705,7 @@
         <p:spPr>
           <a:xfrm>
             <a:off x="8284464" y="4873752"/>
-            <a:ext cx="118784" cy="68580"/>
+            <a:ext cx="0" cy="137160"/>
           </a:xfrm>
           <a:prstGeom prst="line">
             <a:avLst/>
@@ -19011,9 +18739,9 @@
           <p:nvPr/>
         </p:nvCxnSpPr>
         <p:spPr>
-          <a:xfrm>
-            <a:off x="8284464" y="4873752"/>
-            <a:ext cx="0" cy="137160"/>
+          <a:xfrm flipH="1">
+            <a:off x="8165679" y="4873752"/>
+            <a:ext cx="118785" cy="68580"/>
           </a:xfrm>
           <a:prstGeom prst="line">
             <a:avLst/>
@@ -19047,8 +18775,8 @@
           <p:nvPr/>
         </p:nvCxnSpPr>
         <p:spPr>
-          <a:xfrm flipH="1">
-            <a:off x="8165679" y="4873752"/>
+          <a:xfrm flipH="1" flipV="1">
+            <a:off x="8165679" y="4805172"/>
             <a:ext cx="118785" cy="68580"/>
           </a:xfrm>
           <a:prstGeom prst="line">
@@ -19076,45 +18804,9 @@
           </a:fontRef>
         </p:style>
       </p:cxnSp>
-      <p:cxnSp>
-        <p:nvCxnSpPr>
-          <p:cNvPr id="38" name="Connector 37"/>
-          <p:cNvCxnSpPr/>
-          <p:nvPr/>
-        </p:nvCxnSpPr>
-        <p:spPr>
-          <a:xfrm flipH="1" flipV="1">
-            <a:off x="8165679" y="4805172"/>
-            <a:ext cx="118785" cy="68580"/>
-          </a:xfrm>
-          <a:prstGeom prst="line">
-            <a:avLst/>
-          </a:prstGeom>
-          <a:ln w="9525">
-            <a:solidFill>
-              <a:srgbClr val="D9D3C6"/>
-            </a:solidFill>
-          </a:ln>
-          <a:effectLst/>
-        </p:spPr>
-        <p:style>
-          <a:lnRef idx="2">
-            <a:schemeClr val="accent1"/>
-          </a:lnRef>
-          <a:fillRef idx="0">
-            <a:schemeClr val="accent1"/>
-          </a:fillRef>
-          <a:effectRef idx="1">
-            <a:schemeClr val="accent1"/>
-          </a:effectRef>
-          <a:fontRef idx="minor">
-            <a:schemeClr val="tx1"/>
-          </a:fontRef>
-        </p:style>
-      </p:cxnSp>
-      <p:sp>
-        <p:nvSpPr>
-          <p:cNvPr id="39" name="Rounded Rectangle 38"/>
+      <p:sp>
+        <p:nvSpPr>
+          <p:cNvPr id="38" name="Rounded Rectangle 37"/>
           <p:cNvSpPr/>
           <p:nvPr/>
         </p:nvSpPr>
@@ -19160,7 +18852,7 @@
       </p:sp>
       <p:sp>
         <p:nvSpPr>
-          <p:cNvPr id="40" name="Rounded Rectangle 39"/>
+          <p:cNvPr id="39" name="Rounded Rectangle 38"/>
           <p:cNvSpPr/>
           <p:nvPr/>
         </p:nvSpPr>
@@ -19206,7 +18898,7 @@
       </p:sp>
       <p:sp>
         <p:nvSpPr>
-          <p:cNvPr id="41" name="Rounded Rectangle 40"/>
+          <p:cNvPr id="40" name="Rounded Rectangle 39"/>
           <p:cNvSpPr/>
           <p:nvPr/>
         </p:nvSpPr>
@@ -19252,7 +18944,7 @@
       </p:sp>
       <p:sp>
         <p:nvSpPr>
-          <p:cNvPr id="42" name="Rounded Rectangle 41"/>
+          <p:cNvPr id="41" name="Rounded Rectangle 40"/>
           <p:cNvSpPr/>
           <p:nvPr/>
         </p:nvSpPr>
@@ -19298,7 +18990,7 @@
       </p:sp>
       <p:sp>
         <p:nvSpPr>
-          <p:cNvPr id="43" name="Rounded Rectangle 42"/>
+          <p:cNvPr id="42" name="Rounded Rectangle 41"/>
           <p:cNvSpPr/>
           <p:nvPr/>
         </p:nvSpPr>
@@ -19344,7 +19036,7 @@
       </p:sp>
       <p:sp>
         <p:nvSpPr>
-          <p:cNvPr id="44" name="Rounded Rectangle 43"/>
+          <p:cNvPr id="43" name="Rounded Rectangle 42"/>
           <p:cNvSpPr/>
           <p:nvPr/>
         </p:nvSpPr>
@@ -19390,7 +19082,7 @@
       </p:sp>
       <p:sp>
         <p:nvSpPr>
-          <p:cNvPr id="45" name="Rounded Rectangle 44"/>
+          <p:cNvPr id="44" name="Rounded Rectangle 43"/>
           <p:cNvSpPr/>
           <p:nvPr/>
         </p:nvSpPr>
@@ -19436,7 +19128,7 @@
       </p:sp>
       <p:sp>
         <p:nvSpPr>
-          <p:cNvPr id="46" name="TextBox 45"/>
+          <p:cNvPr id="45" name="TextBox 44"/>
           <p:cNvSpPr txBox="1"/>
           <p:nvPr/>
         </p:nvSpPr>
@@ -19483,7 +19175,7 @@
       </p:sp>
       <p:sp>
         <p:nvSpPr>
-          <p:cNvPr id="47" name="TextBox 46"/>
+          <p:cNvPr id="46" name="TextBox 45"/>
           <p:cNvSpPr txBox="1"/>
           <p:nvPr/>
         </p:nvSpPr>
@@ -19686,14 +19378,60 @@
       </p:sp>
       <p:sp>
         <p:nvSpPr>
-          <p:cNvPr id="5" name="Rectangle 4"/>
+          <p:cNvPr id="5" name="Rounded Rectangle 4"/>
           <p:cNvSpPr/>
           <p:nvPr/>
         </p:nvSpPr>
         <p:spPr>
           <a:xfrm>
-            <a:off x="566928" y="1191006"/>
-            <a:ext cx="1097280" cy="45720"/>
+            <a:off x="548640" y="4050791"/>
+            <a:ext cx="8046720" cy="498347"/>
+          </a:xfrm>
+          <a:prstGeom prst="roundRect">
+            <a:avLst>
+              <a:gd name="adj" fmla="val 8000"/>
+            </a:avLst>
+          </a:prstGeom>
+          <a:solidFill>
+            <a:srgbClr val="EAF3FA"/>
+          </a:solidFill>
+          <a:ln>
+            <a:noFill/>
+          </a:ln>
+          <a:effectLst/>
+        </p:spPr>
+        <p:style>
+          <a:lnRef idx="1">
+            <a:schemeClr val="accent1"/>
+          </a:lnRef>
+          <a:fillRef idx="3">
+            <a:schemeClr val="accent1"/>
+          </a:fillRef>
+          <a:effectRef idx="2">
+            <a:schemeClr val="accent1"/>
+          </a:effectRef>
+          <a:fontRef idx="minor">
+            <a:schemeClr val="lt1"/>
+          </a:fontRef>
+        </p:style>
+        <p:txBody>
+          <a:bodyPr rtlCol="0" anchor="ctr"/>
+          <a:lstStyle/>
+          <a:p>
+            <a:pPr algn="ctr"/>
+          </a:p>
+        </p:txBody>
+      </p:sp>
+      <p:sp>
+        <p:nvSpPr>
+          <p:cNvPr id="6" name="Rectangle 5"/>
+          <p:cNvSpPr/>
+          <p:nvPr/>
+        </p:nvSpPr>
+        <p:spPr>
+          <a:xfrm>
+            <a:off x="548640" y="4090659"/>
+            <a:ext cx="64008" cy="418612"/>
           </a:xfrm>
           <a:prstGeom prst="rect">
             <a:avLst/>
@@ -19730,97 +19468,7 @@
       </p:sp>
       <p:sp>
         <p:nvSpPr>
-          <p:cNvPr id="6" name="Rounded Rectangle 5"/>
-          <p:cNvSpPr/>
-          <p:nvPr/>
-        </p:nvSpPr>
-        <p:spPr>
-          <a:xfrm>
-            <a:off x="548640" y="4050791"/>
-            <a:ext cx="8046720" cy="498347"/>
-          </a:xfrm>
-          <a:prstGeom prst="roundRect">
-            <a:avLst>
-              <a:gd name="adj" fmla="val 8000"/>
-            </a:avLst>
-          </a:prstGeom>
-          <a:solidFill>
-            <a:srgbClr val="EAF3FA"/>
-          </a:solidFill>
-          <a:ln>
-            <a:noFill/>
-          </a:ln>
-          <a:effectLst/>
-        </p:spPr>
-        <p:style>
-          <a:lnRef idx="1">
-            <a:schemeClr val="accent1"/>
-          </a:lnRef>
-          <a:fillRef idx="3">
-            <a:schemeClr val="accent1"/>
-          </a:fillRef>
-          <a:effectRef idx="2">
-            <a:schemeClr val="accent1"/>
-          </a:effectRef>
-          <a:fontRef idx="minor">
-            <a:schemeClr val="lt1"/>
-          </a:fontRef>
-        </p:style>
-        <p:txBody>
-          <a:bodyPr rtlCol="0" anchor="ctr"/>
-          <a:lstStyle/>
-          <a:p>
-            <a:pPr algn="ctr"/>
-          </a:p>
-        </p:txBody>
-      </p:sp>
-      <p:sp>
-        <p:nvSpPr>
-          <p:cNvPr id="7" name="Rectangle 6"/>
-          <p:cNvSpPr/>
-          <p:nvPr/>
-        </p:nvSpPr>
-        <p:spPr>
-          <a:xfrm>
-            <a:off x="548640" y="4090659"/>
-            <a:ext cx="64008" cy="418612"/>
-          </a:xfrm>
-          <a:prstGeom prst="rect">
-            <a:avLst/>
-          </a:prstGeom>
-          <a:solidFill>
-            <a:srgbClr val="E1542A"/>
-          </a:solidFill>
-          <a:ln>
-            <a:noFill/>
-          </a:ln>
-          <a:effectLst/>
-        </p:spPr>
-        <p:style>
-          <a:lnRef idx="1">
-            <a:schemeClr val="accent1"/>
-          </a:lnRef>
-          <a:fillRef idx="3">
-            <a:schemeClr val="accent1"/>
-          </a:fillRef>
-          <a:effectRef idx="2">
-            <a:schemeClr val="accent1"/>
-          </a:effectRef>
-          <a:fontRef idx="minor">
-            <a:schemeClr val="lt1"/>
-          </a:fontRef>
-        </p:style>
-        <p:txBody>
-          <a:bodyPr rtlCol="0" anchor="ctr"/>
-          <a:lstStyle/>
-          <a:p>
-            <a:pPr algn="ctr"/>
-          </a:p>
-        </p:txBody>
-      </p:sp>
-      <p:sp>
-        <p:nvSpPr>
-          <p:cNvPr id="8" name="TextBox 7"/>
+          <p:cNvPr id="7" name="TextBox 6"/>
           <p:cNvSpPr txBox="1"/>
           <p:nvPr/>
         </p:nvSpPr>
@@ -19877,7 +19525,7 @@
       </p:sp>
       <p:sp>
         <p:nvSpPr>
-          <p:cNvPr id="9" name="Rounded Rectangle 8"/>
+          <p:cNvPr id="8" name="Rounded Rectangle 7"/>
           <p:cNvSpPr/>
           <p:nvPr/>
         </p:nvSpPr>
@@ -19925,7 +19573,7 @@
       </p:sp>
       <p:sp>
         <p:nvSpPr>
-          <p:cNvPr id="10" name="Rounded Rectangle 9"/>
+          <p:cNvPr id="9" name="Rounded Rectangle 8"/>
           <p:cNvSpPr/>
           <p:nvPr/>
         </p:nvSpPr>
@@ -19971,7 +19619,7 @@
       </p:sp>
       <p:pic>
         <p:nvPicPr>
-          <p:cNvPr id="11" name="Picture 10" descr="arrow-down_168581.png"/>
+          <p:cNvPr id="10" name="Picture 9" descr="arrow-down_168581.png"/>
           <p:cNvPicPr>
             <a:picLocks noChangeAspect="1"/>
           </p:cNvPicPr>
@@ -19995,7 +19643,7 @@
       </p:pic>
       <p:sp>
         <p:nvSpPr>
-          <p:cNvPr id="12" name="TextBox 11"/>
+          <p:cNvPr id="11" name="TextBox 10"/>
           <p:cNvSpPr txBox="1"/>
           <p:nvPr/>
         </p:nvSpPr>
@@ -20042,7 +19690,7 @@
       </p:sp>
       <p:sp>
         <p:nvSpPr>
-          <p:cNvPr id="13" name="TextBox 12"/>
+          <p:cNvPr id="12" name="TextBox 11"/>
           <p:cNvSpPr txBox="1"/>
           <p:nvPr/>
         </p:nvSpPr>
@@ -20089,7 +19737,7 @@
       </p:sp>
       <p:sp>
         <p:nvSpPr>
-          <p:cNvPr id="14" name="Rounded Rectangle 13"/>
+          <p:cNvPr id="13" name="Rounded Rectangle 12"/>
           <p:cNvSpPr/>
           <p:nvPr/>
         </p:nvSpPr>
@@ -20135,7 +19783,7 @@
       </p:sp>
       <p:sp>
         <p:nvSpPr>
-          <p:cNvPr id="15" name="TextBox 14"/>
+          <p:cNvPr id="14" name="TextBox 13"/>
           <p:cNvSpPr txBox="1"/>
           <p:nvPr/>
         </p:nvSpPr>
@@ -20182,7 +19830,7 @@
       </p:sp>
       <p:sp>
         <p:nvSpPr>
-          <p:cNvPr id="16" name="Rounded Rectangle 15"/>
+          <p:cNvPr id="15" name="Rounded Rectangle 14"/>
           <p:cNvSpPr/>
           <p:nvPr/>
         </p:nvSpPr>
@@ -20228,7 +19876,7 @@
       </p:sp>
       <p:sp>
         <p:nvSpPr>
-          <p:cNvPr id="17" name="TextBox 16"/>
+          <p:cNvPr id="16" name="TextBox 15"/>
           <p:cNvSpPr txBox="1"/>
           <p:nvPr/>
         </p:nvSpPr>
@@ -20275,7 +19923,7 @@
       </p:sp>
       <p:sp>
         <p:nvSpPr>
-          <p:cNvPr id="18" name="Rounded Rectangle 17"/>
+          <p:cNvPr id="17" name="Rounded Rectangle 16"/>
           <p:cNvSpPr/>
           <p:nvPr/>
         </p:nvSpPr>
@@ -20321,7 +19969,7 @@
       </p:sp>
       <p:sp>
         <p:nvSpPr>
-          <p:cNvPr id="19" name="TextBox 18"/>
+          <p:cNvPr id="18" name="TextBox 17"/>
           <p:cNvSpPr txBox="1"/>
           <p:nvPr/>
         </p:nvSpPr>
@@ -20368,7 +20016,7 @@
       </p:sp>
       <p:sp>
         <p:nvSpPr>
-          <p:cNvPr id="20" name="Rounded Rectangle 19"/>
+          <p:cNvPr id="19" name="Rounded Rectangle 18"/>
           <p:cNvSpPr/>
           <p:nvPr/>
         </p:nvSpPr>
@@ -20414,7 +20062,7 @@
       </p:sp>
       <p:sp>
         <p:nvSpPr>
-          <p:cNvPr id="21" name="TextBox 20"/>
+          <p:cNvPr id="20" name="TextBox 19"/>
           <p:cNvSpPr txBox="1"/>
           <p:nvPr/>
         </p:nvSpPr>
@@ -20461,7 +20109,7 @@
       </p:sp>
       <p:sp>
         <p:nvSpPr>
-          <p:cNvPr id="22" name="Rounded Rectangle 21"/>
+          <p:cNvPr id="21" name="Rounded Rectangle 20"/>
           <p:cNvSpPr/>
           <p:nvPr/>
         </p:nvSpPr>
@@ -20509,7 +20157,7 @@
       </p:sp>
       <p:sp>
         <p:nvSpPr>
-          <p:cNvPr id="23" name="Rounded Rectangle 22"/>
+          <p:cNvPr id="22" name="Rounded Rectangle 21"/>
           <p:cNvSpPr/>
           <p:nvPr/>
         </p:nvSpPr>
@@ -20555,7 +20203,7 @@
       </p:sp>
       <p:pic>
         <p:nvPicPr>
-          <p:cNvPr id="24" name="Picture 23" descr="arrow-up_e1542a.png"/>
+          <p:cNvPr id="23" name="Picture 22" descr="arrow-up_e1542a.png"/>
           <p:cNvPicPr>
             <a:picLocks noChangeAspect="1"/>
           </p:cNvPicPr>
@@ -20579,7 +20227,7 @@
       </p:pic>
       <p:sp>
         <p:nvSpPr>
-          <p:cNvPr id="25" name="TextBox 24"/>
+          <p:cNvPr id="24" name="TextBox 23"/>
           <p:cNvSpPr txBox="1"/>
           <p:nvPr/>
         </p:nvSpPr>
@@ -20626,7 +20274,7 @@
       </p:sp>
       <p:sp>
         <p:nvSpPr>
-          <p:cNvPr id="26" name="TextBox 25"/>
+          <p:cNvPr id="25" name="TextBox 24"/>
           <p:cNvSpPr txBox="1"/>
           <p:nvPr/>
         </p:nvSpPr>
@@ -20673,7 +20321,7 @@
       </p:sp>
       <p:sp>
         <p:nvSpPr>
-          <p:cNvPr id="27" name="TextBox 26"/>
+          <p:cNvPr id="26" name="TextBox 25"/>
           <p:cNvSpPr txBox="1"/>
           <p:nvPr/>
         </p:nvSpPr>
@@ -20720,7 +20368,7 @@
       </p:sp>
       <p:sp>
         <p:nvSpPr>
-          <p:cNvPr id="28" name="TextBox 27"/>
+          <p:cNvPr id="27" name="TextBox 26"/>
           <p:cNvSpPr txBox="1"/>
           <p:nvPr/>
         </p:nvSpPr>
@@ -20767,7 +20415,7 @@
       </p:sp>
       <p:cxnSp>
         <p:nvCxnSpPr>
-          <p:cNvPr id="29" name="Connector 28"/>
+          <p:cNvPr id="28" name="Connector 27"/>
           <p:cNvCxnSpPr/>
           <p:nvPr/>
         </p:nvCxnSpPr>
@@ -20775,6 +20423,42 @@
           <a:xfrm flipV="1">
             <a:off x="8284464" y="4736592"/>
             <a:ext cx="0" cy="137160"/>
+          </a:xfrm>
+          <a:prstGeom prst="line">
+            <a:avLst/>
+          </a:prstGeom>
+          <a:ln w="9525">
+            <a:solidFill>
+              <a:srgbClr val="D9D3C6"/>
+            </a:solidFill>
+          </a:ln>
+          <a:effectLst/>
+        </p:spPr>
+        <p:style>
+          <a:lnRef idx="2">
+            <a:schemeClr val="accent1"/>
+          </a:lnRef>
+          <a:fillRef idx="0">
+            <a:schemeClr val="accent1"/>
+          </a:fillRef>
+          <a:effectRef idx="1">
+            <a:schemeClr val="accent1"/>
+          </a:effectRef>
+          <a:fontRef idx="minor">
+            <a:schemeClr val="tx1"/>
+          </a:fontRef>
+        </p:style>
+      </p:cxnSp>
+      <p:cxnSp>
+        <p:nvCxnSpPr>
+          <p:cNvPr id="29" name="Connector 28"/>
+          <p:cNvCxnSpPr/>
+          <p:nvPr/>
+        </p:nvCxnSpPr>
+        <p:spPr>
+          <a:xfrm flipV="1">
+            <a:off x="8284464" y="4805172"/>
+            <a:ext cx="118784" cy="68580"/>
           </a:xfrm>
           <a:prstGeom prst="line">
             <a:avLst/>
@@ -20808,8 +20492,8 @@
           <p:nvPr/>
         </p:nvCxnSpPr>
         <p:spPr>
-          <a:xfrm flipV="1">
-            <a:off x="8284464" y="4805172"/>
+          <a:xfrm>
+            <a:off x="8284464" y="4873752"/>
             <a:ext cx="118784" cy="68580"/>
           </a:xfrm>
           <a:prstGeom prst="line">
@@ -20846,7 +20530,7 @@
         <p:spPr>
           <a:xfrm>
             <a:off x="8284464" y="4873752"/>
-            <a:ext cx="118784" cy="68580"/>
+            <a:ext cx="0" cy="137160"/>
           </a:xfrm>
           <a:prstGeom prst="line">
             <a:avLst/>
@@ -20880,9 +20564,9 @@
           <p:nvPr/>
         </p:nvCxnSpPr>
         <p:spPr>
-          <a:xfrm>
-            <a:off x="8284464" y="4873752"/>
-            <a:ext cx="0" cy="137160"/>
+          <a:xfrm flipH="1">
+            <a:off x="8165679" y="4873752"/>
+            <a:ext cx="118785" cy="68580"/>
           </a:xfrm>
           <a:prstGeom prst="line">
             <a:avLst/>
@@ -20916,8 +20600,8 @@
           <p:nvPr/>
         </p:nvCxnSpPr>
         <p:spPr>
-          <a:xfrm flipH="1">
-            <a:off x="8165679" y="4873752"/>
+          <a:xfrm flipH="1" flipV="1">
+            <a:off x="8165679" y="4805172"/>
             <a:ext cx="118785" cy="68580"/>
           </a:xfrm>
           <a:prstGeom prst="line">
@@ -20945,45 +20629,9 @@
           </a:fontRef>
         </p:style>
       </p:cxnSp>
-      <p:cxnSp>
-        <p:nvCxnSpPr>
-          <p:cNvPr id="34" name="Connector 33"/>
-          <p:cNvCxnSpPr/>
-          <p:nvPr/>
-        </p:nvCxnSpPr>
-        <p:spPr>
-          <a:xfrm flipH="1" flipV="1">
-            <a:off x="8165679" y="4805172"/>
-            <a:ext cx="118785" cy="68580"/>
-          </a:xfrm>
-          <a:prstGeom prst="line">
-            <a:avLst/>
-          </a:prstGeom>
-          <a:ln w="9525">
-            <a:solidFill>
-              <a:srgbClr val="D9D3C6"/>
-            </a:solidFill>
-          </a:ln>
-          <a:effectLst/>
-        </p:spPr>
-        <p:style>
-          <a:lnRef idx="2">
-            <a:schemeClr val="accent1"/>
-          </a:lnRef>
-          <a:fillRef idx="0">
-            <a:schemeClr val="accent1"/>
-          </a:fillRef>
-          <a:effectRef idx="1">
-            <a:schemeClr val="accent1"/>
-          </a:effectRef>
-          <a:fontRef idx="minor">
-            <a:schemeClr val="tx1"/>
-          </a:fontRef>
-        </p:style>
-      </p:cxnSp>
-      <p:sp>
-        <p:nvSpPr>
-          <p:cNvPr id="35" name="Rounded Rectangle 34"/>
+      <p:sp>
+        <p:nvSpPr>
+          <p:cNvPr id="34" name="Rounded Rectangle 33"/>
           <p:cNvSpPr/>
           <p:nvPr/>
         </p:nvSpPr>
@@ -21029,7 +20677,7 @@
       </p:sp>
       <p:sp>
         <p:nvSpPr>
-          <p:cNvPr id="36" name="Rounded Rectangle 35"/>
+          <p:cNvPr id="35" name="Rounded Rectangle 34"/>
           <p:cNvSpPr/>
           <p:nvPr/>
         </p:nvSpPr>
@@ -21075,7 +20723,7 @@
       </p:sp>
       <p:sp>
         <p:nvSpPr>
-          <p:cNvPr id="37" name="Rounded Rectangle 36"/>
+          <p:cNvPr id="36" name="Rounded Rectangle 35"/>
           <p:cNvSpPr/>
           <p:nvPr/>
         </p:nvSpPr>
@@ -21121,7 +20769,7 @@
       </p:sp>
       <p:sp>
         <p:nvSpPr>
-          <p:cNvPr id="38" name="Rounded Rectangle 37"/>
+          <p:cNvPr id="37" name="Rounded Rectangle 36"/>
           <p:cNvSpPr/>
           <p:nvPr/>
         </p:nvSpPr>
@@ -21167,7 +20815,7 @@
       </p:sp>
       <p:sp>
         <p:nvSpPr>
-          <p:cNvPr id="39" name="Rounded Rectangle 38"/>
+          <p:cNvPr id="38" name="Rounded Rectangle 37"/>
           <p:cNvSpPr/>
           <p:nvPr/>
         </p:nvSpPr>
@@ -21213,7 +20861,7 @@
       </p:sp>
       <p:sp>
         <p:nvSpPr>
-          <p:cNvPr id="40" name="Rounded Rectangle 39"/>
+          <p:cNvPr id="39" name="Rounded Rectangle 38"/>
           <p:cNvSpPr/>
           <p:nvPr/>
         </p:nvSpPr>
@@ -21259,7 +20907,7 @@
       </p:sp>
       <p:sp>
         <p:nvSpPr>
-          <p:cNvPr id="41" name="Rounded Rectangle 40"/>
+          <p:cNvPr id="40" name="Rounded Rectangle 39"/>
           <p:cNvSpPr/>
           <p:nvPr/>
         </p:nvSpPr>
@@ -21305,7 +20953,7 @@
       </p:sp>
       <p:sp>
         <p:nvSpPr>
-          <p:cNvPr id="42" name="TextBox 41"/>
+          <p:cNvPr id="41" name="TextBox 40"/>
           <p:cNvSpPr txBox="1"/>
           <p:nvPr/>
         </p:nvSpPr>
@@ -21352,7 +21000,7 @@
       </p:sp>
       <p:sp>
         <p:nvSpPr>
-          <p:cNvPr id="43" name="TextBox 42"/>
+          <p:cNvPr id="42" name="TextBox 41"/>
           <p:cNvSpPr txBox="1"/>
           <p:nvPr/>
         </p:nvSpPr>
@@ -21555,51 +21203,7 @@
       </p:sp>
       <p:sp>
         <p:nvSpPr>
-          <p:cNvPr id="5" name="Rectangle 4"/>
-          <p:cNvSpPr/>
-          <p:nvPr/>
-        </p:nvSpPr>
-        <p:spPr>
-          <a:xfrm>
-            <a:off x="566928" y="1191006"/>
-            <a:ext cx="1097280" cy="45720"/>
-          </a:xfrm>
-          <a:prstGeom prst="rect">
-            <a:avLst/>
-          </a:prstGeom>
-          <a:solidFill>
-            <a:srgbClr val="E1542A"/>
-          </a:solidFill>
-          <a:ln>
-            <a:noFill/>
-          </a:ln>
-          <a:effectLst/>
-        </p:spPr>
-        <p:style>
-          <a:lnRef idx="1">
-            <a:schemeClr val="accent1"/>
-          </a:lnRef>
-          <a:fillRef idx="3">
-            <a:schemeClr val="accent1"/>
-          </a:fillRef>
-          <a:effectRef idx="2">
-            <a:schemeClr val="accent1"/>
-          </a:effectRef>
-          <a:fontRef idx="minor">
-            <a:schemeClr val="lt1"/>
-          </a:fontRef>
-        </p:style>
-        <p:txBody>
-          <a:bodyPr rtlCol="0" anchor="ctr"/>
-          <a:lstStyle/>
-          <a:p>
-            <a:pPr algn="ctr"/>
-          </a:p>
-        </p:txBody>
-      </p:sp>
-      <p:sp>
-        <p:nvSpPr>
-          <p:cNvPr id="6" name="Rounded Rectangle 5"/>
+          <p:cNvPr id="5" name="Rounded Rectangle 4"/>
           <p:cNvSpPr/>
           <p:nvPr/>
         </p:nvSpPr>
@@ -21647,7 +21251,7 @@
       </p:sp>
       <p:sp>
         <p:nvSpPr>
-          <p:cNvPr id="7" name="Rounded Rectangle 6"/>
+          <p:cNvPr id="6" name="Rounded Rectangle 5"/>
           <p:cNvSpPr/>
           <p:nvPr/>
         </p:nvSpPr>
@@ -21693,7 +21297,7 @@
       </p:sp>
       <p:pic>
         <p:nvPicPr>
-          <p:cNvPr id="8" name="Picture 7" descr="heart-pulse_e1542a.png"/>
+          <p:cNvPr id="7" name="Picture 6" descr="heart-pulse_e1542a.png"/>
           <p:cNvPicPr>
             <a:picLocks noChangeAspect="1"/>
           </p:cNvPicPr>
@@ -21717,7 +21321,7 @@
       </p:pic>
       <p:sp>
         <p:nvSpPr>
-          <p:cNvPr id="9" name="TextBox 8"/>
+          <p:cNvPr id="8" name="TextBox 7"/>
           <p:cNvSpPr txBox="1"/>
           <p:nvPr/>
         </p:nvSpPr>
@@ -21764,7 +21368,7 @@
       </p:sp>
       <p:sp>
         <p:nvSpPr>
-          <p:cNvPr id="10" name="TextBox 9"/>
+          <p:cNvPr id="9" name="TextBox 8"/>
           <p:cNvSpPr txBox="1"/>
           <p:nvPr/>
         </p:nvSpPr>
@@ -21811,7 +21415,7 @@
       </p:sp>
       <p:sp>
         <p:nvSpPr>
-          <p:cNvPr id="11" name="Rounded Rectangle 10"/>
+          <p:cNvPr id="10" name="Rounded Rectangle 9"/>
           <p:cNvSpPr/>
           <p:nvPr/>
         </p:nvSpPr>
@@ -21859,7 +21463,7 @@
       </p:sp>
       <p:sp>
         <p:nvSpPr>
-          <p:cNvPr id="12" name="Rounded Rectangle 11"/>
+          <p:cNvPr id="11" name="Rounded Rectangle 10"/>
           <p:cNvSpPr/>
           <p:nvPr/>
         </p:nvSpPr>
@@ -21905,7 +21509,7 @@
       </p:sp>
       <p:pic>
         <p:nvPicPr>
-          <p:cNvPr id="13" name="Picture 12" descr="scan-eye_e1542a.png"/>
+          <p:cNvPr id="12" name="Picture 11" descr="scan-eye_e1542a.png"/>
           <p:cNvPicPr>
             <a:picLocks noChangeAspect="1"/>
           </p:cNvPicPr>
@@ -21929,7 +21533,7 @@
       </p:pic>
       <p:sp>
         <p:nvSpPr>
-          <p:cNvPr id="14" name="TextBox 13"/>
+          <p:cNvPr id="13" name="TextBox 12"/>
           <p:cNvSpPr txBox="1"/>
           <p:nvPr/>
         </p:nvSpPr>
@@ -21976,7 +21580,7 @@
       </p:sp>
       <p:sp>
         <p:nvSpPr>
-          <p:cNvPr id="15" name="TextBox 14"/>
+          <p:cNvPr id="14" name="TextBox 13"/>
           <p:cNvSpPr txBox="1"/>
           <p:nvPr/>
         </p:nvSpPr>
@@ -22023,7 +21627,7 @@
       </p:sp>
       <p:sp>
         <p:nvSpPr>
-          <p:cNvPr id="16" name="Rounded Rectangle 15"/>
+          <p:cNvPr id="15" name="Rounded Rectangle 14"/>
           <p:cNvSpPr/>
           <p:nvPr/>
         </p:nvSpPr>
@@ -22071,7 +21675,7 @@
       </p:sp>
       <p:sp>
         <p:nvSpPr>
-          <p:cNvPr id="17" name="Rounded Rectangle 16"/>
+          <p:cNvPr id="16" name="Rounded Rectangle 15"/>
           <p:cNvSpPr/>
           <p:nvPr/>
         </p:nvSpPr>
@@ -22117,7 +21721,7 @@
       </p:sp>
       <p:pic>
         <p:nvPicPr>
-          <p:cNvPr id="18" name="Picture 17" descr="gauge_e1542a.png"/>
+          <p:cNvPr id="17" name="Picture 16" descr="gauge_e1542a.png"/>
           <p:cNvPicPr>
             <a:picLocks noChangeAspect="1"/>
           </p:cNvPicPr>
@@ -22141,7 +21745,7 @@
       </p:pic>
       <p:sp>
         <p:nvSpPr>
-          <p:cNvPr id="19" name="TextBox 18"/>
+          <p:cNvPr id="18" name="TextBox 17"/>
           <p:cNvSpPr txBox="1"/>
           <p:nvPr/>
         </p:nvSpPr>
@@ -22188,7 +21792,7 @@
       </p:sp>
       <p:sp>
         <p:nvSpPr>
-          <p:cNvPr id="20" name="TextBox 19"/>
+          <p:cNvPr id="19" name="TextBox 18"/>
           <p:cNvSpPr txBox="1"/>
           <p:nvPr/>
         </p:nvSpPr>
@@ -22235,7 +21839,7 @@
       </p:sp>
       <p:sp>
         <p:nvSpPr>
-          <p:cNvPr id="21" name="Rounded Rectangle 20"/>
+          <p:cNvPr id="20" name="Rounded Rectangle 19"/>
           <p:cNvSpPr/>
           <p:nvPr/>
         </p:nvSpPr>
@@ -22283,7 +21887,7 @@
       </p:sp>
       <p:sp>
         <p:nvSpPr>
-          <p:cNvPr id="22" name="Rounded Rectangle 21"/>
+          <p:cNvPr id="21" name="Rounded Rectangle 20"/>
           <p:cNvSpPr/>
           <p:nvPr/>
         </p:nvSpPr>
@@ -22329,7 +21933,7 @@
       </p:sp>
       <p:pic>
         <p:nvPicPr>
-          <p:cNvPr id="23" name="Picture 22" descr="copy_e1542a.png"/>
+          <p:cNvPr id="22" name="Picture 21" descr="copy_e1542a.png"/>
           <p:cNvPicPr>
             <a:picLocks noChangeAspect="1"/>
           </p:cNvPicPr>
@@ -22353,7 +21957,7 @@
       </p:pic>
       <p:sp>
         <p:nvSpPr>
-          <p:cNvPr id="24" name="TextBox 23"/>
+          <p:cNvPr id="23" name="TextBox 22"/>
           <p:cNvSpPr txBox="1"/>
           <p:nvPr/>
         </p:nvSpPr>
@@ -22400,7 +22004,7 @@
       </p:sp>
       <p:sp>
         <p:nvSpPr>
-          <p:cNvPr id="25" name="TextBox 24"/>
+          <p:cNvPr id="24" name="TextBox 23"/>
           <p:cNvSpPr txBox="1"/>
           <p:nvPr/>
         </p:nvSpPr>
@@ -22447,7 +22051,7 @@
       </p:sp>
       <p:sp>
         <p:nvSpPr>
-          <p:cNvPr id="26" name="Rounded Rectangle 25"/>
+          <p:cNvPr id="25" name="Rounded Rectangle 24"/>
           <p:cNvSpPr/>
           <p:nvPr/>
         </p:nvSpPr>
@@ -22495,7 +22099,7 @@
       </p:sp>
       <p:sp>
         <p:nvSpPr>
-          <p:cNvPr id="27" name="Rounded Rectangle 26"/>
+          <p:cNvPr id="26" name="Rounded Rectangle 25"/>
           <p:cNvSpPr/>
           <p:nvPr/>
         </p:nvSpPr>
@@ -22541,7 +22145,7 @@
       </p:sp>
       <p:pic>
         <p:nvPicPr>
-          <p:cNvPr id="28" name="Picture 27" descr="brain_e1542a.png"/>
+          <p:cNvPr id="27" name="Picture 26" descr="brain_e1542a.png"/>
           <p:cNvPicPr>
             <a:picLocks noChangeAspect="1"/>
           </p:cNvPicPr>
@@ -22565,7 +22169,7 @@
       </p:pic>
       <p:sp>
         <p:nvSpPr>
-          <p:cNvPr id="29" name="TextBox 28"/>
+          <p:cNvPr id="28" name="TextBox 27"/>
           <p:cNvSpPr txBox="1"/>
           <p:nvPr/>
         </p:nvSpPr>
@@ -22612,7 +22216,7 @@
       </p:sp>
       <p:sp>
         <p:nvSpPr>
-          <p:cNvPr id="30" name="TextBox 29"/>
+          <p:cNvPr id="29" name="TextBox 28"/>
           <p:cNvSpPr txBox="1"/>
           <p:nvPr/>
         </p:nvSpPr>
@@ -22659,7 +22263,7 @@
       </p:sp>
       <p:sp>
         <p:nvSpPr>
-          <p:cNvPr id="31" name="Rounded Rectangle 30"/>
+          <p:cNvPr id="30" name="Rounded Rectangle 29"/>
           <p:cNvSpPr/>
           <p:nvPr/>
         </p:nvSpPr>
@@ -22707,7 +22311,7 @@
       </p:sp>
       <p:sp>
         <p:nvSpPr>
-          <p:cNvPr id="32" name="Rounded Rectangle 31"/>
+          <p:cNvPr id="31" name="Rounded Rectangle 30"/>
           <p:cNvSpPr/>
           <p:nvPr/>
         </p:nvSpPr>
@@ -22753,7 +22357,7 @@
       </p:sp>
       <p:pic>
         <p:nvPicPr>
-          <p:cNvPr id="33" name="Picture 32" descr="unplug_e1542a.png"/>
+          <p:cNvPr id="32" name="Picture 31" descr="unplug_e1542a.png"/>
           <p:cNvPicPr>
             <a:picLocks noChangeAspect="1"/>
           </p:cNvPicPr>
@@ -22777,7 +22381,7 @@
       </p:pic>
       <p:sp>
         <p:nvSpPr>
-          <p:cNvPr id="34" name="TextBox 33"/>
+          <p:cNvPr id="33" name="TextBox 32"/>
           <p:cNvSpPr txBox="1"/>
           <p:nvPr/>
         </p:nvSpPr>
@@ -22824,7 +22428,7 @@
       </p:sp>
       <p:sp>
         <p:nvSpPr>
-          <p:cNvPr id="35" name="TextBox 34"/>
+          <p:cNvPr id="34" name="TextBox 33"/>
           <p:cNvSpPr txBox="1"/>
           <p:nvPr/>
         </p:nvSpPr>
@@ -22871,7 +22475,7 @@
       </p:sp>
       <p:cxnSp>
         <p:nvCxnSpPr>
-          <p:cNvPr id="36" name="Connector 35"/>
+          <p:cNvPr id="35" name="Connector 34"/>
           <p:cNvCxnSpPr/>
           <p:nvPr/>
         </p:nvCxnSpPr>
@@ -22879,6 +22483,42 @@
           <a:xfrm flipV="1">
             <a:off x="8284464" y="4736592"/>
             <a:ext cx="0" cy="137160"/>
+          </a:xfrm>
+          <a:prstGeom prst="line">
+            <a:avLst/>
+          </a:prstGeom>
+          <a:ln w="9525">
+            <a:solidFill>
+              <a:srgbClr val="D9D3C6"/>
+            </a:solidFill>
+          </a:ln>
+          <a:effectLst/>
+        </p:spPr>
+        <p:style>
+          <a:lnRef idx="2">
+            <a:schemeClr val="accent1"/>
+          </a:lnRef>
+          <a:fillRef idx="0">
+            <a:schemeClr val="accent1"/>
+          </a:fillRef>
+          <a:effectRef idx="1">
+            <a:schemeClr val="accent1"/>
+          </a:effectRef>
+          <a:fontRef idx="minor">
+            <a:schemeClr val="tx1"/>
+          </a:fontRef>
+        </p:style>
+      </p:cxnSp>
+      <p:cxnSp>
+        <p:nvCxnSpPr>
+          <p:cNvPr id="36" name="Connector 35"/>
+          <p:cNvCxnSpPr/>
+          <p:nvPr/>
+        </p:nvCxnSpPr>
+        <p:spPr>
+          <a:xfrm flipV="1">
+            <a:off x="8284464" y="4805172"/>
+            <a:ext cx="118784" cy="68580"/>
           </a:xfrm>
           <a:prstGeom prst="line">
             <a:avLst/>
@@ -22912,8 +22552,8 @@
           <p:nvPr/>
         </p:nvCxnSpPr>
         <p:spPr>
-          <a:xfrm flipV="1">
-            <a:off x="8284464" y="4805172"/>
+          <a:xfrm>
+            <a:off x="8284464" y="4873752"/>
             <a:ext cx="118784" cy="68580"/>
           </a:xfrm>
           <a:prstGeom prst="line">
@@ -22950,7 +22590,7 @@
         <p:spPr>
           <a:xfrm>
             <a:off x="8284464" y="4873752"/>
-            <a:ext cx="118784" cy="68580"/>
+            <a:ext cx="0" cy="137160"/>
           </a:xfrm>
           <a:prstGeom prst="line">
             <a:avLst/>
@@ -22984,9 +22624,9 @@
           <p:nvPr/>
         </p:nvCxnSpPr>
         <p:spPr>
-          <a:xfrm>
-            <a:off x="8284464" y="4873752"/>
-            <a:ext cx="0" cy="137160"/>
+          <a:xfrm flipH="1">
+            <a:off x="8165679" y="4873752"/>
+            <a:ext cx="118785" cy="68580"/>
           </a:xfrm>
           <a:prstGeom prst="line">
             <a:avLst/>
@@ -23020,8 +22660,8 @@
           <p:nvPr/>
         </p:nvCxnSpPr>
         <p:spPr>
-          <a:xfrm flipH="1">
-            <a:off x="8165679" y="4873752"/>
+          <a:xfrm flipH="1" flipV="1">
+            <a:off x="8165679" y="4805172"/>
             <a:ext cx="118785" cy="68580"/>
           </a:xfrm>
           <a:prstGeom prst="line">
@@ -23049,45 +22689,9 @@
           </a:fontRef>
         </p:style>
       </p:cxnSp>
-      <p:cxnSp>
-        <p:nvCxnSpPr>
-          <p:cNvPr id="41" name="Connector 40"/>
-          <p:cNvCxnSpPr/>
-          <p:nvPr/>
-        </p:nvCxnSpPr>
-        <p:spPr>
-          <a:xfrm flipH="1" flipV="1">
-            <a:off x="8165679" y="4805172"/>
-            <a:ext cx="118785" cy="68580"/>
-          </a:xfrm>
-          <a:prstGeom prst="line">
-            <a:avLst/>
-          </a:prstGeom>
-          <a:ln w="9525">
-            <a:solidFill>
-              <a:srgbClr val="D9D3C6"/>
-            </a:solidFill>
-          </a:ln>
-          <a:effectLst/>
-        </p:spPr>
-        <p:style>
-          <a:lnRef idx="2">
-            <a:schemeClr val="accent1"/>
-          </a:lnRef>
-          <a:fillRef idx="0">
-            <a:schemeClr val="accent1"/>
-          </a:fillRef>
-          <a:effectRef idx="1">
-            <a:schemeClr val="accent1"/>
-          </a:effectRef>
-          <a:fontRef idx="minor">
-            <a:schemeClr val="tx1"/>
-          </a:fontRef>
-        </p:style>
-      </p:cxnSp>
-      <p:sp>
-        <p:nvSpPr>
-          <p:cNvPr id="42" name="Rounded Rectangle 41"/>
+      <p:sp>
+        <p:nvSpPr>
+          <p:cNvPr id="41" name="Rounded Rectangle 40"/>
           <p:cNvSpPr/>
           <p:nvPr/>
         </p:nvSpPr>
@@ -23133,7 +22737,7 @@
       </p:sp>
       <p:sp>
         <p:nvSpPr>
-          <p:cNvPr id="43" name="Rounded Rectangle 42"/>
+          <p:cNvPr id="42" name="Rounded Rectangle 41"/>
           <p:cNvSpPr/>
           <p:nvPr/>
         </p:nvSpPr>
@@ -23179,7 +22783,7 @@
       </p:sp>
       <p:sp>
         <p:nvSpPr>
-          <p:cNvPr id="44" name="Rounded Rectangle 43"/>
+          <p:cNvPr id="43" name="Rounded Rectangle 42"/>
           <p:cNvSpPr/>
           <p:nvPr/>
         </p:nvSpPr>
@@ -23225,7 +22829,7 @@
       </p:sp>
       <p:sp>
         <p:nvSpPr>
-          <p:cNvPr id="45" name="Rounded Rectangle 44"/>
+          <p:cNvPr id="44" name="Rounded Rectangle 43"/>
           <p:cNvSpPr/>
           <p:nvPr/>
         </p:nvSpPr>
@@ -23271,7 +22875,7 @@
       </p:sp>
       <p:sp>
         <p:nvSpPr>
-          <p:cNvPr id="46" name="Rounded Rectangle 45"/>
+          <p:cNvPr id="45" name="Rounded Rectangle 44"/>
           <p:cNvSpPr/>
           <p:nvPr/>
         </p:nvSpPr>
@@ -23317,7 +22921,7 @@
       </p:sp>
       <p:sp>
         <p:nvSpPr>
-          <p:cNvPr id="47" name="Rounded Rectangle 46"/>
+          <p:cNvPr id="46" name="Rounded Rectangle 45"/>
           <p:cNvSpPr/>
           <p:nvPr/>
         </p:nvSpPr>
@@ -23363,7 +22967,7 @@
       </p:sp>
       <p:sp>
         <p:nvSpPr>
-          <p:cNvPr id="48" name="Rounded Rectangle 47"/>
+          <p:cNvPr id="47" name="Rounded Rectangle 46"/>
           <p:cNvSpPr/>
           <p:nvPr/>
         </p:nvSpPr>
@@ -23409,7 +23013,7 @@
       </p:sp>
       <p:sp>
         <p:nvSpPr>
-          <p:cNvPr id="49" name="TextBox 48"/>
+          <p:cNvPr id="48" name="TextBox 47"/>
           <p:cNvSpPr txBox="1"/>
           <p:nvPr/>
         </p:nvSpPr>
@@ -23456,7 +23060,7 @@
       </p:sp>
       <p:sp>
         <p:nvSpPr>
-          <p:cNvPr id="50" name="TextBox 49"/>
+          <p:cNvPr id="49" name="TextBox 48"/>
           <p:cNvSpPr txBox="1"/>
           <p:nvPr/>
         </p:nvSpPr>

--- a/templates/decks/zh/solo-company-talk/template.pptx
+++ b/templates/decks/zh/solo-company-talk/template.pptx
@@ -12984,7 +12984,7 @@
         <p:spPr>
           <a:xfrm>
             <a:off x="365760" y="1554480"/>
-            <a:ext cx="4835562" cy="640080"/>
+            <a:ext cx="2514492" cy="640080"/>
           </a:xfrm>
           <a:prstGeom prst="roundRect">
             <a:avLst>
@@ -13021,16 +13021,52 @@
           </a:p>
         </p:txBody>
       </p:sp>
-      <p:sp>
-        <p:nvSpPr>
-          <p:cNvPr id="6" name="TextBox 5"/>
+      <p:cxnSp>
+        <p:nvCxnSpPr>
+          <p:cNvPr id="6" name="Connector 5"/>
+          <p:cNvCxnSpPr/>
+          <p:nvPr/>
+        </p:nvCxnSpPr>
+        <p:spPr>
+          <a:xfrm>
+            <a:off x="2880252" y="1874519"/>
+            <a:ext cx="146304" cy="0"/>
+          </a:xfrm>
+          <a:prstGeom prst="line">
+            <a:avLst/>
+          </a:prstGeom>
+          <a:ln w="12700">
+            <a:solidFill>
+              <a:srgbClr val="8C8578"/>
+            </a:solidFill>
+          </a:ln>
+          <a:effectLst/>
+        </p:spPr>
+        <p:style>
+          <a:lnRef idx="2">
+            <a:schemeClr val="accent1"/>
+          </a:lnRef>
+          <a:fillRef idx="0">
+            <a:schemeClr val="accent1"/>
+          </a:fillRef>
+          <a:effectRef idx="1">
+            <a:schemeClr val="accent1"/>
+          </a:effectRef>
+          <a:fontRef idx="minor">
+            <a:schemeClr val="tx1"/>
+          </a:fontRef>
+        </p:style>
+      </p:cxnSp>
+      <p:sp>
+        <p:nvSpPr>
+          <p:cNvPr id="7" name="TextBox 6"/>
           <p:cNvSpPr txBox="1"/>
           <p:nvPr/>
         </p:nvSpPr>
         <p:spPr>
           <a:xfrm>
-            <a:off x="365760" y="1554480"/>
-            <a:ext cx="4835562" cy="640080"/>
+            <a:off x="3081420" y="1554480"/>
+            <a:ext cx="2119901" cy="640080"/>
           </a:xfrm>
           <a:prstGeom prst="rect">
             <a:avLst/>
@@ -13044,9 +13080,9 @@
           </a:bodyPr>
           <a:lstStyle/>
           <a:p>
-            <a:pPr algn="ctr">
+            <a:pPr algn="l">
               <a:lnSpc>
-                <a:spcPct val="98000"/>
+                <a:spcPct val="112000"/>
               </a:lnSpc>
               <a:spcBef>
                 <a:spcPts val="0"/>
@@ -13056,9 +13092,9 @@
               </a:spcAft>
             </a:pPr>
             <a:r>
-              <a:rPr sz="1400" b="1" i="0">
+              <a:rPr sz="1250" b="1" i="0">
                 <a:solidFill>
-                  <a:srgbClr val="FFFFFF"/>
+                  <a:srgbClr val="1B1C1F"/>
                 </a:solidFill>
                 <a:latin typeface="Avenir Next"/>
                 <a:ea typeface="Hiragino Sans GB"/>
@@ -13070,14 +13106,14 @@
       </p:sp>
       <p:sp>
         <p:nvSpPr>
-          <p:cNvPr id="7" name="Rounded Rectangle 6"/>
+          <p:cNvPr id="8" name="Rounded Rectangle 7"/>
           <p:cNvSpPr/>
           <p:nvPr/>
         </p:nvSpPr>
         <p:spPr>
           <a:xfrm>
-            <a:off x="1010501" y="2194560"/>
-            <a:ext cx="3546079" cy="640080"/>
+            <a:off x="701025" y="2194560"/>
+            <a:ext cx="1843961" cy="640080"/>
           </a:xfrm>
           <a:prstGeom prst="roundRect">
             <a:avLst>
@@ -13114,16 +13150,52 @@
           </a:p>
         </p:txBody>
       </p:sp>
-      <p:sp>
-        <p:nvSpPr>
-          <p:cNvPr id="8" name="TextBox 7"/>
+      <p:cxnSp>
+        <p:nvCxnSpPr>
+          <p:cNvPr id="9" name="Connector 8"/>
+          <p:cNvCxnSpPr/>
+          <p:nvPr/>
+        </p:nvCxnSpPr>
+        <p:spPr>
+          <a:xfrm>
+            <a:off x="2544986" y="2514600"/>
+            <a:ext cx="481570" cy="0"/>
+          </a:xfrm>
+          <a:prstGeom prst="line">
+            <a:avLst/>
+          </a:prstGeom>
+          <a:ln w="12700">
+            <a:solidFill>
+              <a:srgbClr val="8C8578"/>
+            </a:solidFill>
+          </a:ln>
+          <a:effectLst/>
+        </p:spPr>
+        <p:style>
+          <a:lnRef idx="2">
+            <a:schemeClr val="accent1"/>
+          </a:lnRef>
+          <a:fillRef idx="0">
+            <a:schemeClr val="accent1"/>
+          </a:fillRef>
+          <a:effectRef idx="1">
+            <a:schemeClr val="accent1"/>
+          </a:effectRef>
+          <a:fontRef idx="minor">
+            <a:schemeClr val="tx1"/>
+          </a:fontRef>
+        </p:style>
+      </p:cxnSp>
+      <p:sp>
+        <p:nvSpPr>
+          <p:cNvPr id="10" name="TextBox 9"/>
           <p:cNvSpPr txBox="1"/>
           <p:nvPr/>
         </p:nvSpPr>
         <p:spPr>
           <a:xfrm>
-            <a:off x="1010501" y="2194560"/>
-            <a:ext cx="3546079" cy="640080"/>
+            <a:off x="3081420" y="2194560"/>
+            <a:ext cx="2119901" cy="640080"/>
           </a:xfrm>
           <a:prstGeom prst="rect">
             <a:avLst/>
@@ -13137,9 +13209,9 @@
           </a:bodyPr>
           <a:lstStyle/>
           <a:p>
-            <a:pPr algn="ctr">
+            <a:pPr algn="l">
               <a:lnSpc>
-                <a:spcPct val="98000"/>
+                <a:spcPct val="112000"/>
               </a:lnSpc>
               <a:spcBef>
                 <a:spcPts val="0"/>
@@ -13149,7 +13221,7 @@
               </a:spcAft>
             </a:pPr>
             <a:r>
-              <a:rPr sz="1400" b="1" i="0">
+              <a:rPr sz="1250" b="1" i="0">
                 <a:solidFill>
                   <a:srgbClr val="1B1C1F"/>
                 </a:solidFill>
@@ -13163,14 +13235,14 @@
       </p:sp>
       <p:sp>
         <p:nvSpPr>
-          <p:cNvPr id="9" name="Rounded Rectangle 8"/>
+          <p:cNvPr id="11" name="Rounded Rectangle 10"/>
           <p:cNvSpPr/>
           <p:nvPr/>
         </p:nvSpPr>
         <p:spPr>
           <a:xfrm>
-            <a:off x="1655243" y="2834639"/>
-            <a:ext cx="2256595" cy="640080"/>
+            <a:off x="1036291" y="2834639"/>
+            <a:ext cx="1173429" cy="640080"/>
           </a:xfrm>
           <a:prstGeom prst="roundRect">
             <a:avLst>
@@ -13207,16 +13279,52 @@
           </a:p>
         </p:txBody>
       </p:sp>
-      <p:sp>
-        <p:nvSpPr>
-          <p:cNvPr id="10" name="TextBox 9"/>
+      <p:cxnSp>
+        <p:nvCxnSpPr>
+          <p:cNvPr id="12" name="Connector 11"/>
+          <p:cNvCxnSpPr/>
+          <p:nvPr/>
+        </p:nvCxnSpPr>
+        <p:spPr>
+          <a:xfrm>
+            <a:off x="2209721" y="3154679"/>
+            <a:ext cx="816835" cy="0"/>
+          </a:xfrm>
+          <a:prstGeom prst="line">
+            <a:avLst/>
+          </a:prstGeom>
+          <a:ln w="12700">
+            <a:solidFill>
+              <a:srgbClr val="8C8578"/>
+            </a:solidFill>
+          </a:ln>
+          <a:effectLst/>
+        </p:spPr>
+        <p:style>
+          <a:lnRef idx="2">
+            <a:schemeClr val="accent1"/>
+          </a:lnRef>
+          <a:fillRef idx="0">
+            <a:schemeClr val="accent1"/>
+          </a:fillRef>
+          <a:effectRef idx="1">
+            <a:schemeClr val="accent1"/>
+          </a:effectRef>
+          <a:fontRef idx="minor">
+            <a:schemeClr val="tx1"/>
+          </a:fontRef>
+        </p:style>
+      </p:cxnSp>
+      <p:sp>
+        <p:nvSpPr>
+          <p:cNvPr id="13" name="TextBox 12"/>
           <p:cNvSpPr txBox="1"/>
           <p:nvPr/>
         </p:nvSpPr>
         <p:spPr>
           <a:xfrm>
-            <a:off x="1655243" y="2834639"/>
-            <a:ext cx="2256595" cy="640080"/>
+            <a:off x="3081420" y="2834639"/>
+            <a:ext cx="2119901" cy="640080"/>
           </a:xfrm>
           <a:prstGeom prst="rect">
             <a:avLst/>
@@ -13230,9 +13338,9 @@
           </a:bodyPr>
           <a:lstStyle/>
           <a:p>
-            <a:pPr algn="ctr">
+            <a:pPr algn="l">
               <a:lnSpc>
-                <a:spcPct val="98000"/>
+                <a:spcPct val="112000"/>
               </a:lnSpc>
               <a:spcBef>
                 <a:spcPts val="0"/>
@@ -13242,7 +13350,7 @@
               </a:spcAft>
             </a:pPr>
             <a:r>
-              <a:rPr sz="1400" b="1" i="0">
+              <a:rPr sz="1250" b="1" i="0">
                 <a:solidFill>
                   <a:srgbClr val="1B1C1F"/>
                 </a:solidFill>
@@ -13256,18 +13364,18 @@
       </p:sp>
       <p:sp>
         <p:nvSpPr>
-          <p:cNvPr id="11" name="Rounded Rectangle 10"/>
+          <p:cNvPr id="14" name="Rounded Rectangle 13"/>
           <p:cNvSpPr/>
           <p:nvPr/>
         </p:nvSpPr>
         <p:spPr>
           <a:xfrm>
-            <a:off x="2299984" y="3474720"/>
-            <a:ext cx="967112" cy="640080"/>
+            <a:off x="1371556" y="3474720"/>
+            <a:ext cx="502898" cy="640080"/>
           </a:xfrm>
           <a:prstGeom prst="roundRect">
             <a:avLst>
-              <a:gd name="adj" fmla="val 8571"/>
+              <a:gd name="adj" fmla="val 10909"/>
             </a:avLst>
           </a:prstGeom>
           <a:solidFill>
@@ -13300,16 +13408,52 @@
           </a:p>
         </p:txBody>
       </p:sp>
-      <p:sp>
-        <p:nvSpPr>
-          <p:cNvPr id="12" name="TextBox 11"/>
+      <p:cxnSp>
+        <p:nvCxnSpPr>
+          <p:cNvPr id="15" name="Connector 14"/>
+          <p:cNvCxnSpPr/>
+          <p:nvPr/>
+        </p:nvCxnSpPr>
+        <p:spPr>
+          <a:xfrm>
+            <a:off x="1874455" y="3794759"/>
+            <a:ext cx="1152101" cy="0"/>
+          </a:xfrm>
+          <a:prstGeom prst="line">
+            <a:avLst/>
+          </a:prstGeom>
+          <a:ln w="12700">
+            <a:solidFill>
+              <a:srgbClr val="8C8578"/>
+            </a:solidFill>
+          </a:ln>
+          <a:effectLst/>
+        </p:spPr>
+        <p:style>
+          <a:lnRef idx="2">
+            <a:schemeClr val="accent1"/>
+          </a:lnRef>
+          <a:fillRef idx="0">
+            <a:schemeClr val="accent1"/>
+          </a:fillRef>
+          <a:effectRef idx="1">
+            <a:schemeClr val="accent1"/>
+          </a:effectRef>
+          <a:fontRef idx="minor">
+            <a:schemeClr val="tx1"/>
+          </a:fontRef>
+        </p:style>
+      </p:cxnSp>
+      <p:sp>
+        <p:nvSpPr>
+          <p:cNvPr id="16" name="TextBox 15"/>
           <p:cNvSpPr txBox="1"/>
           <p:nvPr/>
         </p:nvSpPr>
         <p:spPr>
           <a:xfrm>
-            <a:off x="2299984" y="3474720"/>
-            <a:ext cx="967112" cy="640080"/>
+            <a:off x="3081420" y="3474720"/>
+            <a:ext cx="2119901" cy="640080"/>
           </a:xfrm>
           <a:prstGeom prst="rect">
             <a:avLst/>
@@ -13323,9 +13467,9 @@
           </a:bodyPr>
           <a:lstStyle/>
           <a:p>
-            <a:pPr algn="ctr">
+            <a:pPr algn="l">
               <a:lnSpc>
-                <a:spcPct val="98000"/>
+                <a:spcPct val="112000"/>
               </a:lnSpc>
               <a:spcBef>
                 <a:spcPts val="0"/>
@@ -13335,7 +13479,7 @@
               </a:spcAft>
             </a:pPr>
             <a:r>
-              <a:rPr sz="1400" b="1" i="0">
+              <a:rPr sz="1250" b="1" i="0">
                 <a:solidFill>
                   <a:srgbClr val="1B1C1F"/>
                 </a:solidFill>
@@ -13349,7 +13493,7 @@
       </p:sp>
       <p:sp>
         <p:nvSpPr>
-          <p:cNvPr id="13" name="TextBox 12"/>
+          <p:cNvPr id="17" name="TextBox 16"/>
           <p:cNvSpPr txBox="1"/>
           <p:nvPr/>
         </p:nvSpPr>
@@ -13406,7 +13550,7 @@
       </p:sp>
       <p:sp>
         <p:nvSpPr>
-          <p:cNvPr id="14" name="TextBox 13"/>
+          <p:cNvPr id="18" name="TextBox 17"/>
           <p:cNvSpPr txBox="1"/>
           <p:nvPr/>
         </p:nvSpPr>
@@ -13453,7 +13597,7 @@
       </p:sp>
       <p:sp>
         <p:nvSpPr>
-          <p:cNvPr id="15" name="TextBox 14"/>
+          <p:cNvPr id="19" name="TextBox 18"/>
           <p:cNvSpPr txBox="1"/>
           <p:nvPr/>
         </p:nvSpPr>
@@ -13523,7 +13667,7 @@
       </p:sp>
       <p:sp>
         <p:nvSpPr>
-          <p:cNvPr id="16" name="TextBox 15"/>
+          <p:cNvPr id="20" name="TextBox 19"/>
           <p:cNvSpPr txBox="1"/>
           <p:nvPr/>
         </p:nvSpPr>
@@ -13570,7 +13714,7 @@
       </p:sp>
       <p:cxnSp>
         <p:nvCxnSpPr>
-          <p:cNvPr id="17" name="Connector 16"/>
+          <p:cNvPr id="21" name="Connector 20"/>
           <p:cNvCxnSpPr/>
           <p:nvPr/>
         </p:nvCxnSpPr>
@@ -13578,150 +13722,6 @@
           <a:xfrm flipV="1">
             <a:off x="8284464" y="4736592"/>
             <a:ext cx="0" cy="137160"/>
-          </a:xfrm>
-          <a:prstGeom prst="line">
-            <a:avLst/>
-          </a:prstGeom>
-          <a:ln w="9525">
-            <a:solidFill>
-              <a:srgbClr val="D9D3C6"/>
-            </a:solidFill>
-          </a:ln>
-          <a:effectLst/>
-        </p:spPr>
-        <p:style>
-          <a:lnRef idx="2">
-            <a:schemeClr val="accent1"/>
-          </a:lnRef>
-          <a:fillRef idx="0">
-            <a:schemeClr val="accent1"/>
-          </a:fillRef>
-          <a:effectRef idx="1">
-            <a:schemeClr val="accent1"/>
-          </a:effectRef>
-          <a:fontRef idx="minor">
-            <a:schemeClr val="tx1"/>
-          </a:fontRef>
-        </p:style>
-      </p:cxnSp>
-      <p:cxnSp>
-        <p:nvCxnSpPr>
-          <p:cNvPr id="18" name="Connector 17"/>
-          <p:cNvCxnSpPr/>
-          <p:nvPr/>
-        </p:nvCxnSpPr>
-        <p:spPr>
-          <a:xfrm flipV="1">
-            <a:off x="8284464" y="4805172"/>
-            <a:ext cx="118784" cy="68580"/>
-          </a:xfrm>
-          <a:prstGeom prst="line">
-            <a:avLst/>
-          </a:prstGeom>
-          <a:ln w="9525">
-            <a:solidFill>
-              <a:srgbClr val="D9D3C6"/>
-            </a:solidFill>
-          </a:ln>
-          <a:effectLst/>
-        </p:spPr>
-        <p:style>
-          <a:lnRef idx="2">
-            <a:schemeClr val="accent1"/>
-          </a:lnRef>
-          <a:fillRef idx="0">
-            <a:schemeClr val="accent1"/>
-          </a:fillRef>
-          <a:effectRef idx="1">
-            <a:schemeClr val="accent1"/>
-          </a:effectRef>
-          <a:fontRef idx="minor">
-            <a:schemeClr val="tx1"/>
-          </a:fontRef>
-        </p:style>
-      </p:cxnSp>
-      <p:cxnSp>
-        <p:nvCxnSpPr>
-          <p:cNvPr id="19" name="Connector 18"/>
-          <p:cNvCxnSpPr/>
-          <p:nvPr/>
-        </p:nvCxnSpPr>
-        <p:spPr>
-          <a:xfrm>
-            <a:off x="8284464" y="4873752"/>
-            <a:ext cx="118784" cy="68580"/>
-          </a:xfrm>
-          <a:prstGeom prst="line">
-            <a:avLst/>
-          </a:prstGeom>
-          <a:ln w="9525">
-            <a:solidFill>
-              <a:srgbClr val="D9D3C6"/>
-            </a:solidFill>
-          </a:ln>
-          <a:effectLst/>
-        </p:spPr>
-        <p:style>
-          <a:lnRef idx="2">
-            <a:schemeClr val="accent1"/>
-          </a:lnRef>
-          <a:fillRef idx="0">
-            <a:schemeClr val="accent1"/>
-          </a:fillRef>
-          <a:effectRef idx="1">
-            <a:schemeClr val="accent1"/>
-          </a:effectRef>
-          <a:fontRef idx="minor">
-            <a:schemeClr val="tx1"/>
-          </a:fontRef>
-        </p:style>
-      </p:cxnSp>
-      <p:cxnSp>
-        <p:nvCxnSpPr>
-          <p:cNvPr id="20" name="Connector 19"/>
-          <p:cNvCxnSpPr/>
-          <p:nvPr/>
-        </p:nvCxnSpPr>
-        <p:spPr>
-          <a:xfrm>
-            <a:off x="8284464" y="4873752"/>
-            <a:ext cx="0" cy="137160"/>
-          </a:xfrm>
-          <a:prstGeom prst="line">
-            <a:avLst/>
-          </a:prstGeom>
-          <a:ln w="9525">
-            <a:solidFill>
-              <a:srgbClr val="D9D3C6"/>
-            </a:solidFill>
-          </a:ln>
-          <a:effectLst/>
-        </p:spPr>
-        <p:style>
-          <a:lnRef idx="2">
-            <a:schemeClr val="accent1"/>
-          </a:lnRef>
-          <a:fillRef idx="0">
-            <a:schemeClr val="accent1"/>
-          </a:fillRef>
-          <a:effectRef idx="1">
-            <a:schemeClr val="accent1"/>
-          </a:effectRef>
-          <a:fontRef idx="minor">
-            <a:schemeClr val="tx1"/>
-          </a:fontRef>
-        </p:style>
-      </p:cxnSp>
-      <p:cxnSp>
-        <p:nvCxnSpPr>
-          <p:cNvPr id="21" name="Connector 20"/>
-          <p:cNvCxnSpPr/>
-          <p:nvPr/>
-        </p:nvCxnSpPr>
-        <p:spPr>
-          <a:xfrm flipH="1">
-            <a:off x="8165679" y="4873752"/>
-            <a:ext cx="118785" cy="68580"/>
           </a:xfrm>
           <a:prstGeom prst="line">
             <a:avLst/>
@@ -13755,9 +13755,9 @@
           <p:nvPr/>
         </p:nvCxnSpPr>
         <p:spPr>
-          <a:xfrm flipH="1" flipV="1">
-            <a:off x="8165679" y="4805172"/>
-            <a:ext cx="118785" cy="68580"/>
+          <a:xfrm flipV="1">
+            <a:off x="8284464" y="4805172"/>
+            <a:ext cx="118784" cy="68580"/>
           </a:xfrm>
           <a:prstGeom prst="line">
             <a:avLst/>
@@ -13784,9 +13784,153 @@
           </a:fontRef>
         </p:style>
       </p:cxnSp>
-      <p:sp>
-        <p:nvSpPr>
-          <p:cNvPr id="23" name="Rounded Rectangle 22"/>
+      <p:cxnSp>
+        <p:nvCxnSpPr>
+          <p:cNvPr id="23" name="Connector 22"/>
+          <p:cNvCxnSpPr/>
+          <p:nvPr/>
+        </p:nvCxnSpPr>
+        <p:spPr>
+          <a:xfrm>
+            <a:off x="8284464" y="4873752"/>
+            <a:ext cx="118784" cy="68580"/>
+          </a:xfrm>
+          <a:prstGeom prst="line">
+            <a:avLst/>
+          </a:prstGeom>
+          <a:ln w="9525">
+            <a:solidFill>
+              <a:srgbClr val="D9D3C6"/>
+            </a:solidFill>
+          </a:ln>
+          <a:effectLst/>
+        </p:spPr>
+        <p:style>
+          <a:lnRef idx="2">
+            <a:schemeClr val="accent1"/>
+          </a:lnRef>
+          <a:fillRef idx="0">
+            <a:schemeClr val="accent1"/>
+          </a:fillRef>
+          <a:effectRef idx="1">
+            <a:schemeClr val="accent1"/>
+          </a:effectRef>
+          <a:fontRef idx="minor">
+            <a:schemeClr val="tx1"/>
+          </a:fontRef>
+        </p:style>
+      </p:cxnSp>
+      <p:cxnSp>
+        <p:nvCxnSpPr>
+          <p:cNvPr id="24" name="Connector 23"/>
+          <p:cNvCxnSpPr/>
+          <p:nvPr/>
+        </p:nvCxnSpPr>
+        <p:spPr>
+          <a:xfrm>
+            <a:off x="8284464" y="4873752"/>
+            <a:ext cx="0" cy="137160"/>
+          </a:xfrm>
+          <a:prstGeom prst="line">
+            <a:avLst/>
+          </a:prstGeom>
+          <a:ln w="9525">
+            <a:solidFill>
+              <a:srgbClr val="D9D3C6"/>
+            </a:solidFill>
+          </a:ln>
+          <a:effectLst/>
+        </p:spPr>
+        <p:style>
+          <a:lnRef idx="2">
+            <a:schemeClr val="accent1"/>
+          </a:lnRef>
+          <a:fillRef idx="0">
+            <a:schemeClr val="accent1"/>
+          </a:fillRef>
+          <a:effectRef idx="1">
+            <a:schemeClr val="accent1"/>
+          </a:effectRef>
+          <a:fontRef idx="minor">
+            <a:schemeClr val="tx1"/>
+          </a:fontRef>
+        </p:style>
+      </p:cxnSp>
+      <p:cxnSp>
+        <p:nvCxnSpPr>
+          <p:cNvPr id="25" name="Connector 24"/>
+          <p:cNvCxnSpPr/>
+          <p:nvPr/>
+        </p:nvCxnSpPr>
+        <p:spPr>
+          <a:xfrm flipH="1">
+            <a:off x="8165679" y="4873752"/>
+            <a:ext cx="118785" cy="68580"/>
+          </a:xfrm>
+          <a:prstGeom prst="line">
+            <a:avLst/>
+          </a:prstGeom>
+          <a:ln w="9525">
+            <a:solidFill>
+              <a:srgbClr val="D9D3C6"/>
+            </a:solidFill>
+          </a:ln>
+          <a:effectLst/>
+        </p:spPr>
+        <p:style>
+          <a:lnRef idx="2">
+            <a:schemeClr val="accent1"/>
+          </a:lnRef>
+          <a:fillRef idx="0">
+            <a:schemeClr val="accent1"/>
+          </a:fillRef>
+          <a:effectRef idx="1">
+            <a:schemeClr val="accent1"/>
+          </a:effectRef>
+          <a:fontRef idx="minor">
+            <a:schemeClr val="tx1"/>
+          </a:fontRef>
+        </p:style>
+      </p:cxnSp>
+      <p:cxnSp>
+        <p:nvCxnSpPr>
+          <p:cNvPr id="26" name="Connector 25"/>
+          <p:cNvCxnSpPr/>
+          <p:nvPr/>
+        </p:nvCxnSpPr>
+        <p:spPr>
+          <a:xfrm flipH="1" flipV="1">
+            <a:off x="8165679" y="4805172"/>
+            <a:ext cx="118785" cy="68580"/>
+          </a:xfrm>
+          <a:prstGeom prst="line">
+            <a:avLst/>
+          </a:prstGeom>
+          <a:ln w="9525">
+            <a:solidFill>
+              <a:srgbClr val="D9D3C6"/>
+            </a:solidFill>
+          </a:ln>
+          <a:effectLst/>
+        </p:spPr>
+        <p:style>
+          <a:lnRef idx="2">
+            <a:schemeClr val="accent1"/>
+          </a:lnRef>
+          <a:fillRef idx="0">
+            <a:schemeClr val="accent1"/>
+          </a:fillRef>
+          <a:effectRef idx="1">
+            <a:schemeClr val="accent1"/>
+          </a:effectRef>
+          <a:fontRef idx="minor">
+            <a:schemeClr val="tx1"/>
+          </a:fontRef>
+        </p:style>
+      </p:cxnSp>
+      <p:sp>
+        <p:nvSpPr>
+          <p:cNvPr id="27" name="Rounded Rectangle 26"/>
           <p:cNvSpPr/>
           <p:nvPr/>
         </p:nvSpPr>
@@ -13832,7 +13976,7 @@
       </p:sp>
       <p:sp>
         <p:nvSpPr>
-          <p:cNvPr id="24" name="Rounded Rectangle 23"/>
+          <p:cNvPr id="28" name="Rounded Rectangle 27"/>
           <p:cNvSpPr/>
           <p:nvPr/>
         </p:nvSpPr>
@@ -13878,7 +14022,7 @@
       </p:sp>
       <p:sp>
         <p:nvSpPr>
-          <p:cNvPr id="25" name="Rounded Rectangle 24"/>
+          <p:cNvPr id="29" name="Rounded Rectangle 28"/>
           <p:cNvSpPr/>
           <p:nvPr/>
         </p:nvSpPr>
@@ -13924,7 +14068,7 @@
       </p:sp>
       <p:sp>
         <p:nvSpPr>
-          <p:cNvPr id="26" name="Rounded Rectangle 25"/>
+          <p:cNvPr id="30" name="Rounded Rectangle 29"/>
           <p:cNvSpPr/>
           <p:nvPr/>
         </p:nvSpPr>
@@ -13970,7 +14114,7 @@
       </p:sp>
       <p:sp>
         <p:nvSpPr>
-          <p:cNvPr id="27" name="Rounded Rectangle 26"/>
+          <p:cNvPr id="31" name="Rounded Rectangle 30"/>
           <p:cNvSpPr/>
           <p:nvPr/>
         </p:nvSpPr>
@@ -14016,7 +14160,7 @@
       </p:sp>
       <p:sp>
         <p:nvSpPr>
-          <p:cNvPr id="28" name="Rounded Rectangle 27"/>
+          <p:cNvPr id="32" name="Rounded Rectangle 31"/>
           <p:cNvSpPr/>
           <p:nvPr/>
         </p:nvSpPr>
@@ -14062,7 +14206,7 @@
       </p:sp>
       <p:sp>
         <p:nvSpPr>
-          <p:cNvPr id="29" name="Rounded Rectangle 28"/>
+          <p:cNvPr id="33" name="Rounded Rectangle 32"/>
           <p:cNvSpPr/>
           <p:nvPr/>
         </p:nvSpPr>
@@ -14108,7 +14252,7 @@
       </p:sp>
       <p:sp>
         <p:nvSpPr>
-          <p:cNvPr id="30" name="TextBox 29"/>
+          <p:cNvPr id="34" name="TextBox 33"/>
           <p:cNvSpPr txBox="1"/>
           <p:nvPr/>
         </p:nvSpPr>
@@ -14155,7 +14299,7 @@
       </p:sp>
       <p:sp>
         <p:nvSpPr>
-          <p:cNvPr id="31" name="TextBox 30"/>
+          <p:cNvPr id="35" name="TextBox 34"/>
           <p:cNvSpPr txBox="1"/>
           <p:nvPr/>
         </p:nvSpPr>

--- a/templates/decks/zh/solo-company-talk/template.pptx
+++ b/templates/decks/zh/solo-company-talk/template.pptx
@@ -4496,51 +4496,7 @@
       </p:sp>
       <p:sp>
         <p:nvSpPr>
-          <p:cNvPr id="6" name="Rectangle 5"/>
-          <p:cNvSpPr/>
-          <p:nvPr/>
-        </p:nvSpPr>
-        <p:spPr>
-          <a:xfrm>
-            <a:off x="658368" y="3072384"/>
-            <a:ext cx="1371600" cy="54864"/>
-          </a:xfrm>
-          <a:prstGeom prst="rect">
-            <a:avLst/>
-          </a:prstGeom>
-          <a:solidFill>
-            <a:srgbClr val="E1542A"/>
-          </a:solidFill>
-          <a:ln>
-            <a:noFill/>
-          </a:ln>
-          <a:effectLst/>
-        </p:spPr>
-        <p:style>
-          <a:lnRef idx="1">
-            <a:schemeClr val="accent1"/>
-          </a:lnRef>
-          <a:fillRef idx="3">
-            <a:schemeClr val="accent1"/>
-          </a:fillRef>
-          <a:effectRef idx="2">
-            <a:schemeClr val="accent1"/>
-          </a:effectRef>
-          <a:fontRef idx="minor">
-            <a:schemeClr val="lt1"/>
-          </a:fontRef>
-        </p:style>
-        <p:txBody>
-          <a:bodyPr rtlCol="0" anchor="ctr"/>
-          <a:lstStyle/>
-          <a:p>
-            <a:pPr algn="ctr"/>
-          </a:p>
-        </p:txBody>
-      </p:sp>
-      <p:sp>
-        <p:nvSpPr>
-          <p:cNvPr id="7" name="TextBox 6"/>
+          <p:cNvPr id="6" name="TextBox 5"/>
           <p:cNvSpPr txBox="1"/>
           <p:nvPr/>
         </p:nvSpPr>
@@ -4610,7 +4566,7 @@
       </p:sp>
       <p:sp>
         <p:nvSpPr>
-          <p:cNvPr id="8" name="TextBox 7"/>
+          <p:cNvPr id="7" name="TextBox 6"/>
           <p:cNvSpPr txBox="1"/>
           <p:nvPr/>
         </p:nvSpPr>
@@ -4657,7 +4613,7 @@
       </p:sp>
       <p:cxnSp>
         <p:nvCxnSpPr>
-          <p:cNvPr id="9" name="Connector 8"/>
+          <p:cNvPr id="8" name="Connector 7"/>
           <p:cNvCxnSpPr/>
           <p:nvPr/>
         </p:nvCxnSpPr>
@@ -4665,6 +4621,42 @@
           <a:xfrm flipV="1">
             <a:off x="7333488" y="1417319"/>
             <a:ext cx="0" cy="1234441"/>
+          </a:xfrm>
+          <a:prstGeom prst="line">
+            <a:avLst/>
+          </a:prstGeom>
+          <a:ln w="13970">
+            <a:solidFill>
+              <a:srgbClr val="168581"/>
+            </a:solidFill>
+          </a:ln>
+          <a:effectLst/>
+        </p:spPr>
+        <p:style>
+          <a:lnRef idx="2">
+            <a:schemeClr val="accent1"/>
+          </a:lnRef>
+          <a:fillRef idx="0">
+            <a:schemeClr val="accent1"/>
+          </a:fillRef>
+          <a:effectRef idx="1">
+            <a:schemeClr val="accent1"/>
+          </a:effectRef>
+          <a:fontRef idx="minor">
+            <a:schemeClr val="tx1"/>
+          </a:fontRef>
+        </p:style>
+      </p:cxnSp>
+      <p:cxnSp>
+        <p:nvCxnSpPr>
+          <p:cNvPr id="9" name="Connector 8"/>
+          <p:cNvCxnSpPr/>
+          <p:nvPr/>
+        </p:nvCxnSpPr>
+        <p:spPr>
+          <a:xfrm flipV="1">
+            <a:off x="7333488" y="1882099"/>
+            <a:ext cx="965124" cy="769661"/>
           </a:xfrm>
           <a:prstGeom prst="line">
             <a:avLst/>
@@ -4698,9 +4690,9 @@
           <p:nvPr/>
         </p:nvCxnSpPr>
         <p:spPr>
-          <a:xfrm flipV="1">
-            <a:off x="7333488" y="1882099"/>
-            <a:ext cx="965124" cy="769661"/>
+          <a:xfrm>
+            <a:off x="7333488" y="2651760"/>
+            <a:ext cx="1203490" cy="274688"/>
           </a:xfrm>
           <a:prstGeom prst="line">
             <a:avLst/>
@@ -4736,7 +4728,7 @@
         <p:spPr>
           <a:xfrm>
             <a:off x="7333488" y="2651760"/>
-            <a:ext cx="1203490" cy="274688"/>
+            <a:ext cx="535603" cy="1112192"/>
           </a:xfrm>
           <a:prstGeom prst="line">
             <a:avLst/>
@@ -4770,9 +4762,9 @@
           <p:nvPr/>
         </p:nvCxnSpPr>
         <p:spPr>
-          <a:xfrm>
-            <a:off x="7333488" y="2651760"/>
-            <a:ext cx="535603" cy="1112192"/>
+          <a:xfrm flipH="1">
+            <a:off x="6797884" y="2651760"/>
+            <a:ext cx="535604" cy="1112192"/>
           </a:xfrm>
           <a:prstGeom prst="line">
             <a:avLst/>
@@ -4807,8 +4799,8 @@
         </p:nvCxnSpPr>
         <p:spPr>
           <a:xfrm flipH="1">
-            <a:off x="6797884" y="2651760"/>
-            <a:ext cx="535604" cy="1112192"/>
+            <a:off x="6129997" y="2651760"/>
+            <a:ext cx="1203491" cy="274688"/>
           </a:xfrm>
           <a:prstGeom prst="line">
             <a:avLst/>
@@ -4842,9 +4834,9 @@
           <p:nvPr/>
         </p:nvCxnSpPr>
         <p:spPr>
-          <a:xfrm flipH="1">
-            <a:off x="6129997" y="2651760"/>
-            <a:ext cx="1203491" cy="274688"/>
+          <a:xfrm flipH="1" flipV="1">
+            <a:off x="6368363" y="1882099"/>
+            <a:ext cx="965125" cy="769661"/>
           </a:xfrm>
           <a:prstGeom prst="line">
             <a:avLst/>
@@ -4871,45 +4863,9 @@
           </a:fontRef>
         </p:style>
       </p:cxnSp>
-      <p:cxnSp>
-        <p:nvCxnSpPr>
-          <p:cNvPr id="15" name="Connector 14"/>
-          <p:cNvCxnSpPr/>
-          <p:nvPr/>
-        </p:nvCxnSpPr>
-        <p:spPr>
-          <a:xfrm flipH="1" flipV="1">
-            <a:off x="6368363" y="1882099"/>
-            <a:ext cx="965125" cy="769661"/>
-          </a:xfrm>
-          <a:prstGeom prst="line">
-            <a:avLst/>
-          </a:prstGeom>
-          <a:ln w="13970">
-            <a:solidFill>
-              <a:srgbClr val="168581"/>
-            </a:solidFill>
-          </a:ln>
-          <a:effectLst/>
-        </p:spPr>
-        <p:style>
-          <a:lnRef idx="2">
-            <a:schemeClr val="accent1"/>
-          </a:lnRef>
-          <a:fillRef idx="0">
-            <a:schemeClr val="accent1"/>
-          </a:fillRef>
-          <a:effectRef idx="1">
-            <a:schemeClr val="accent1"/>
-          </a:effectRef>
-          <a:fontRef idx="minor">
-            <a:schemeClr val="tx1"/>
-          </a:fontRef>
-        </p:style>
-      </p:cxnSp>
-      <p:sp>
-        <p:nvSpPr>
-          <p:cNvPr id="16" name="Rounded Rectangle 15"/>
+      <p:sp>
+        <p:nvSpPr>
+          <p:cNvPr id="15" name="Rounded Rectangle 14"/>
           <p:cNvSpPr/>
           <p:nvPr/>
         </p:nvSpPr>
@@ -4955,7 +4911,7 @@
       </p:sp>
       <p:sp>
         <p:nvSpPr>
-          <p:cNvPr id="17" name="Rounded Rectangle 16"/>
+          <p:cNvPr id="16" name="Rounded Rectangle 15"/>
           <p:cNvSpPr/>
           <p:nvPr/>
         </p:nvSpPr>
@@ -5001,7 +4957,7 @@
       </p:sp>
       <p:sp>
         <p:nvSpPr>
-          <p:cNvPr id="18" name="Rounded Rectangle 17"/>
+          <p:cNvPr id="17" name="Rounded Rectangle 16"/>
           <p:cNvSpPr/>
           <p:nvPr/>
         </p:nvSpPr>
@@ -5047,7 +5003,7 @@
       </p:sp>
       <p:sp>
         <p:nvSpPr>
-          <p:cNvPr id="19" name="Rounded Rectangle 18"/>
+          <p:cNvPr id="18" name="Rounded Rectangle 17"/>
           <p:cNvSpPr/>
           <p:nvPr/>
         </p:nvSpPr>
@@ -5093,7 +5049,7 @@
       </p:sp>
       <p:sp>
         <p:nvSpPr>
-          <p:cNvPr id="20" name="Rounded Rectangle 19"/>
+          <p:cNvPr id="19" name="Rounded Rectangle 18"/>
           <p:cNvSpPr/>
           <p:nvPr/>
         </p:nvSpPr>
@@ -5139,7 +5095,7 @@
       </p:sp>
       <p:sp>
         <p:nvSpPr>
-          <p:cNvPr id="21" name="Rounded Rectangle 20"/>
+          <p:cNvPr id="20" name="Rounded Rectangle 19"/>
           <p:cNvSpPr/>
           <p:nvPr/>
         </p:nvSpPr>
@@ -5185,7 +5141,7 @@
       </p:sp>
       <p:sp>
         <p:nvSpPr>
-          <p:cNvPr id="22" name="Rounded Rectangle 21"/>
+          <p:cNvPr id="21" name="Rounded Rectangle 20"/>
           <p:cNvSpPr/>
           <p:nvPr/>
         </p:nvSpPr>
@@ -5231,7 +5187,7 @@
       </p:sp>
       <p:sp>
         <p:nvSpPr>
-          <p:cNvPr id="23" name="Rounded Rectangle 22"/>
+          <p:cNvPr id="22" name="Rounded Rectangle 21"/>
           <p:cNvSpPr/>
           <p:nvPr/>
         </p:nvSpPr>
@@ -10346,51 +10302,7 @@
       </p:sp>
       <p:sp>
         <p:nvSpPr>
-          <p:cNvPr id="21" name="Rectangle 20"/>
-          <p:cNvSpPr/>
-          <p:nvPr/>
-        </p:nvSpPr>
-        <p:spPr>
-          <a:xfrm>
-            <a:off x="658368" y="3127248"/>
-            <a:ext cx="1371600" cy="54864"/>
-          </a:xfrm>
-          <a:prstGeom prst="rect">
-            <a:avLst/>
-          </a:prstGeom>
-          <a:solidFill>
-            <a:srgbClr val="E1542A"/>
-          </a:solidFill>
-          <a:ln>
-            <a:noFill/>
-          </a:ln>
-          <a:effectLst/>
-        </p:spPr>
-        <p:style>
-          <a:lnRef idx="1">
-            <a:schemeClr val="accent1"/>
-          </a:lnRef>
-          <a:fillRef idx="3">
-            <a:schemeClr val="accent1"/>
-          </a:fillRef>
-          <a:effectRef idx="2">
-            <a:schemeClr val="accent1"/>
-          </a:effectRef>
-          <a:fontRef idx="minor">
-            <a:schemeClr val="lt1"/>
-          </a:fontRef>
-        </p:style>
-        <p:txBody>
-          <a:bodyPr rtlCol="0" anchor="ctr"/>
-          <a:lstStyle/>
-          <a:p>
-            <a:pPr algn="ctr"/>
-          </a:p>
-        </p:txBody>
-      </p:sp>
-      <p:sp>
-        <p:nvSpPr>
-          <p:cNvPr id="22" name="TextBox 21"/>
+          <p:cNvPr id="21" name="TextBox 20"/>
           <p:cNvSpPr txBox="1"/>
           <p:nvPr/>
         </p:nvSpPr>
@@ -10437,7 +10349,7 @@
       </p:sp>
       <p:sp>
         <p:nvSpPr>
-          <p:cNvPr id="23" name="TextBox 22"/>
+          <p:cNvPr id="22" name="TextBox 21"/>
           <p:cNvSpPr txBox="1"/>
           <p:nvPr/>
         </p:nvSpPr>
